--- a/topic08-inheritance/unit-08a-lectures/talk-4-subtyping-substitution/a-subtyping-substitution.pptx
+++ b/topic08-inheritance/unit-08a-lectures/talk-4-subtyping-substitution/a-subtyping-substitution.pptx
@@ -237,7 +237,7 @@
           <a:p>
             <a:fld id="{56BC3C30-7F3D-4B20-9974-47C57B22CA6E}" type="datetimeFigureOut">
               <a:rPr lang="en-IE" smtClean="0"/>
-              <a:t>14/03/2025</a:t>
+              <a:t>13/03/2026</a:t>
             </a:fld>
             <a:endParaRPr lang="en-IE"/>
           </a:p>
@@ -11002,7 +11002,7 @@
             <a:fld id="{1D8BD707-D9CF-40AE-B4C6-C98DA3205C09}" type="datetimeFigureOut">
               <a:rPr lang="en-US" smtClean="0"/>
               <a:pPr/>
-              <a:t>3/14/25</a:t>
+              <a:t>3/13/26</a:t>
             </a:fld>
             <a:endParaRPr lang="en-US"/>
           </a:p>
@@ -11167,7 +11167,7 @@
             <a:fld id="{1D8BD707-D9CF-40AE-B4C6-C98DA3205C09}" type="datetimeFigureOut">
               <a:rPr lang="en-US" smtClean="0"/>
               <a:pPr/>
-              <a:t>3/14/25</a:t>
+              <a:t>3/13/26</a:t>
             </a:fld>
             <a:endParaRPr lang="en-US"/>
           </a:p>
@@ -11342,7 +11342,7 @@
             <a:fld id="{1D8BD707-D9CF-40AE-B4C6-C98DA3205C09}" type="datetimeFigureOut">
               <a:rPr lang="en-US" smtClean="0"/>
               <a:pPr/>
-              <a:t>3/14/25</a:t>
+              <a:t>3/13/26</a:t>
             </a:fld>
             <a:endParaRPr lang="en-US"/>
           </a:p>
@@ -11518,7 +11518,7 @@
             <a:fld id="{1D8BD707-D9CF-40AE-B4C6-C98DA3205C09}" type="datetimeFigureOut">
               <a:rPr lang="en-US" smtClean="0"/>
               <a:pPr/>
-              <a:t>3/14/25</a:t>
+              <a:t>3/13/26</a:t>
             </a:fld>
             <a:endParaRPr lang="en-US"/>
           </a:p>
@@ -11798,7 +11798,7 @@
             <a:fld id="{1D8BD707-D9CF-40AE-B4C6-C98DA3205C09}" type="datetimeFigureOut">
               <a:rPr lang="en-US" smtClean="0"/>
               <a:pPr/>
-              <a:t>3/14/25</a:t>
+              <a:t>3/13/26</a:t>
             </a:fld>
             <a:endParaRPr lang="en-US"/>
           </a:p>
@@ -12091,7 +12091,7 @@
             <a:fld id="{1D8BD707-D9CF-40AE-B4C6-C98DA3205C09}" type="datetimeFigureOut">
               <a:rPr lang="en-US" smtClean="0"/>
               <a:pPr/>
-              <a:t>3/14/25</a:t>
+              <a:t>3/13/26</a:t>
             </a:fld>
             <a:endParaRPr lang="en-US"/>
           </a:p>
@@ -12549,7 +12549,7 @@
             <a:fld id="{1D8BD707-D9CF-40AE-B4C6-C98DA3205C09}" type="datetimeFigureOut">
               <a:rPr lang="en-US" smtClean="0"/>
               <a:pPr/>
-              <a:t>3/14/25</a:t>
+              <a:t>3/13/26</a:t>
             </a:fld>
             <a:endParaRPr lang="en-US"/>
           </a:p>
@@ -12709,7 +12709,7 @@
             <a:fld id="{1D8BD707-D9CF-40AE-B4C6-C98DA3205C09}" type="datetimeFigureOut">
               <a:rPr lang="en-US" smtClean="0"/>
               <a:pPr/>
-              <a:t>3/14/25</a:t>
+              <a:t>3/13/26</a:t>
             </a:fld>
             <a:endParaRPr lang="en-US"/>
           </a:p>
@@ -12836,7 +12836,7 @@
             <a:fld id="{1D8BD707-D9CF-40AE-B4C6-C98DA3205C09}" type="datetimeFigureOut">
               <a:rPr lang="en-US" smtClean="0"/>
               <a:pPr/>
-              <a:t>3/14/25</a:t>
+              <a:t>3/13/26</a:t>
             </a:fld>
             <a:endParaRPr lang="en-US"/>
           </a:p>
@@ -13108,7 +13108,7 @@
             <a:fld id="{1D8BD707-D9CF-40AE-B4C6-C98DA3205C09}" type="datetimeFigureOut">
               <a:rPr lang="en-US" smtClean="0"/>
               <a:pPr/>
-              <a:t>3/14/25</a:t>
+              <a:t>3/13/26</a:t>
             </a:fld>
             <a:endParaRPr lang="en-US"/>
           </a:p>
@@ -13357,7 +13357,7 @@
             <a:fld id="{1D8BD707-D9CF-40AE-B4C6-C98DA3205C09}" type="datetimeFigureOut">
               <a:rPr lang="en-US" smtClean="0"/>
               <a:pPr/>
-              <a:t>3/14/25</a:t>
+              <a:t>3/13/26</a:t>
             </a:fld>
             <a:endParaRPr lang="en-US"/>
           </a:p>
@@ -13565,7 +13565,7 @@
             <a:fld id="{1D8BD707-D9CF-40AE-B4C6-C98DA3205C09}" type="datetimeFigureOut">
               <a:rPr lang="en-US" smtClean="0"/>
               <a:pPr/>
-              <a:t>3/14/25</a:t>
+              <a:t>3/13/26</a:t>
             </a:fld>
             <a:endParaRPr lang="en-US"/>
           </a:p>
@@ -14487,7 +14487,10 @@
             <a:avLst/>
           </a:prstGeom>
           <a:solidFill>
-            <a:srgbClr val="FFFFFF"/>
+            <a:schemeClr val="accent6">
+              <a:lumMod val="40000"/>
+              <a:lumOff val="60000"/>
+            </a:schemeClr>
           </a:solidFill>
           <a:ln w="12700">
             <a:solidFill>
@@ -14498,19 +14501,6 @@
             <a:tailEnd/>
           </a:ln>
           <a:effectLst/>
-          <a:extLst>
-            <a:ext uri="{AF507438-7753-43E0-B8FC-AC1667EBCBE1}">
-              <a14:hiddenEffects xmlns:a14="http://schemas.microsoft.com/office/drawing/2010/main">
-                <a:effectLst>
-                  <a:outerShdw blurRad="63500" dist="38099" dir="2700000" algn="ctr" rotWithShape="0">
-                    <a:schemeClr val="bg2">
-                      <a:alpha val="74998"/>
-                    </a:schemeClr>
-                  </a:outerShdw>
-                </a:effectLst>
-              </a14:hiddenEffects>
-            </a:ext>
-          </a:extLst>
         </p:spPr>
         <p:txBody>
           <a:bodyPr vert="horz" wrap="square" lIns="198000" tIns="190800" rIns="162000" bIns="190800">
@@ -14928,6 +14918,175 @@
   <p:clrMapOvr>
     <a:masterClrMapping/>
   </p:clrMapOvr>
+  <p:timing>
+    <p:tnLst>
+      <p:par>
+        <p:cTn id="1" dur="indefinite" restart="never" nodeType="tmRoot">
+          <p:childTnLst>
+            <p:seq concurrent="1" nextAc="seek">
+              <p:cTn id="2" dur="indefinite" nodeType="mainSeq">
+                <p:childTnLst>
+                  <p:par>
+                    <p:cTn id="3" fill="hold">
+                      <p:stCondLst>
+                        <p:cond delay="indefinite"/>
+                      </p:stCondLst>
+                      <p:childTnLst>
+                        <p:par>
+                          <p:cTn id="4" fill="hold">
+                            <p:stCondLst>
+                              <p:cond delay="0"/>
+                            </p:stCondLst>
+                            <p:childTnLst>
+                              <p:par>
+                                <p:cTn id="5" presetID="1" presetClass="entr" presetSubtype="0" fill="hold" nodeType="clickEffect">
+                                  <p:stCondLst>
+                                    <p:cond delay="0"/>
+                                  </p:stCondLst>
+                                  <p:childTnLst>
+                                    <p:set>
+                                      <p:cBhvr>
+                                        <p:cTn id="6" dur="1" fill="hold">
+                                          <p:stCondLst>
+                                            <p:cond delay="0"/>
+                                          </p:stCondLst>
+                                        </p:cTn>
+                                        <p:tgtEl>
+                                          <p:spTgt spid="30726"/>
+                                        </p:tgtEl>
+                                        <p:attrNameLst>
+                                          <p:attrName>style.visibility</p:attrName>
+                                        </p:attrNameLst>
+                                      </p:cBhvr>
+                                      <p:to>
+                                        <p:strVal val="visible"/>
+                                      </p:to>
+                                    </p:set>
+                                  </p:childTnLst>
+                                </p:cTn>
+                              </p:par>
+                            </p:childTnLst>
+                          </p:cTn>
+                        </p:par>
+                      </p:childTnLst>
+                    </p:cTn>
+                  </p:par>
+                  <p:par>
+                    <p:cTn id="7" fill="hold">
+                      <p:stCondLst>
+                        <p:cond delay="indefinite"/>
+                      </p:stCondLst>
+                      <p:childTnLst>
+                        <p:par>
+                          <p:cTn id="8" fill="hold">
+                            <p:stCondLst>
+                              <p:cond delay="0"/>
+                            </p:stCondLst>
+                            <p:childTnLst>
+                              <p:par>
+                                <p:cTn id="9" presetID="1" presetClass="entr" presetSubtype="0" fill="hold" grpId="0" nodeType="clickEffect">
+                                  <p:stCondLst>
+                                    <p:cond delay="0"/>
+                                  </p:stCondLst>
+                                  <p:childTnLst>
+                                    <p:set>
+                                      <p:cBhvr>
+                                        <p:cTn id="10" dur="1" fill="hold">
+                                          <p:stCondLst>
+                                            <p:cond delay="0"/>
+                                          </p:stCondLst>
+                                        </p:cTn>
+                                        <p:tgtEl>
+                                          <p:spTgt spid="30725"/>
+                                        </p:tgtEl>
+                                        <p:attrNameLst>
+                                          <p:attrName>style.visibility</p:attrName>
+                                        </p:attrNameLst>
+                                      </p:cBhvr>
+                                      <p:to>
+                                        <p:strVal val="visible"/>
+                                      </p:to>
+                                    </p:set>
+                                  </p:childTnLst>
+                                </p:cTn>
+                              </p:par>
+                            </p:childTnLst>
+                          </p:cTn>
+                        </p:par>
+                      </p:childTnLst>
+                    </p:cTn>
+                  </p:par>
+                  <p:par>
+                    <p:cTn id="11" fill="hold">
+                      <p:stCondLst>
+                        <p:cond delay="indefinite"/>
+                      </p:stCondLst>
+                      <p:childTnLst>
+                        <p:par>
+                          <p:cTn id="12" fill="hold">
+                            <p:stCondLst>
+                              <p:cond delay="0"/>
+                            </p:stCondLst>
+                            <p:childTnLst>
+                              <p:par>
+                                <p:cTn id="13" presetID="1" presetClass="entr" presetSubtype="0" fill="hold" grpId="0" nodeType="clickEffect">
+                                  <p:stCondLst>
+                                    <p:cond delay="0"/>
+                                  </p:stCondLst>
+                                  <p:childTnLst>
+                                    <p:set>
+                                      <p:cBhvr>
+                                        <p:cTn id="14" dur="1" fill="hold">
+                                          <p:stCondLst>
+                                            <p:cond delay="0"/>
+                                          </p:stCondLst>
+                                        </p:cTn>
+                                        <p:tgtEl>
+                                          <p:spTgt spid="30724"/>
+                                        </p:tgtEl>
+                                        <p:attrNameLst>
+                                          <p:attrName>style.visibility</p:attrName>
+                                        </p:attrNameLst>
+                                      </p:cBhvr>
+                                      <p:to>
+                                        <p:strVal val="visible"/>
+                                      </p:to>
+                                    </p:set>
+                                  </p:childTnLst>
+                                </p:cTn>
+                              </p:par>
+                            </p:childTnLst>
+                          </p:cTn>
+                        </p:par>
+                      </p:childTnLst>
+                    </p:cTn>
+                  </p:par>
+                </p:childTnLst>
+              </p:cTn>
+              <p:prevCondLst>
+                <p:cond evt="onPrev" delay="0">
+                  <p:tgtEl>
+                    <p:sldTgt/>
+                  </p:tgtEl>
+                </p:cond>
+              </p:prevCondLst>
+              <p:nextCondLst>
+                <p:cond evt="onNext" delay="0">
+                  <p:tgtEl>
+                    <p:sldTgt/>
+                  </p:tgtEl>
+                </p:cond>
+              </p:nextCondLst>
+            </p:seq>
+          </p:childTnLst>
+        </p:cTn>
+      </p:par>
+    </p:tnLst>
+    <p:bldLst>
+      <p:bldP spid="30724" grpId="0" animBg="1"/>
+      <p:bldP spid="30725" grpId="0"/>
+    </p:bldLst>
+  </p:timing>
 </p:sld>
 </file>
 
@@ -15379,60 +15538,6 @@
       </p:sp>
       <p:sp>
         <p:nvSpPr>
-          <p:cNvPr id="10" name="Frame 9"/>
-          <p:cNvSpPr/>
-          <p:nvPr/>
-        </p:nvSpPr>
-        <p:spPr>
-          <a:xfrm>
-            <a:off x="4572000" y="2490786"/>
-            <a:ext cx="609600" cy="381000"/>
-          </a:xfrm>
-          <a:prstGeom prst="frame">
-            <a:avLst>
-              <a:gd name="adj1" fmla="val 3770"/>
-            </a:avLst>
-          </a:prstGeom>
-          <a:solidFill>
-            <a:srgbClr val="FFFF00"/>
-          </a:solidFill>
-          <a:ln>
-            <a:solidFill>
-              <a:srgbClr val="FFFF00"/>
-            </a:solidFill>
-          </a:ln>
-        </p:spPr>
-        <p:style>
-          <a:lnRef idx="2">
-            <a:schemeClr val="accent1">
-              <a:shade val="50000"/>
-            </a:schemeClr>
-          </a:lnRef>
-          <a:fillRef idx="1">
-            <a:schemeClr val="accent1"/>
-          </a:fillRef>
-          <a:effectRef idx="0">
-            <a:schemeClr val="accent1"/>
-          </a:effectRef>
-          <a:fontRef idx="minor">
-            <a:schemeClr val="lt1"/>
-          </a:fontRef>
-        </p:style>
-        <p:txBody>
-          <a:bodyPr rtlCol="0" anchor="ctr"/>
-          <a:lstStyle/>
-          <a:p>
-            <a:pPr algn="ctr"/>
-            <a:endParaRPr lang="en-GB">
-              <a:solidFill>
-                <a:schemeClr val="tx1"/>
-              </a:solidFill>
-            </a:endParaRPr>
-          </a:p>
-        </p:txBody>
-      </p:sp>
-      <p:sp>
-        <p:nvSpPr>
           <p:cNvPr id="11" name="Frame 10"/>
           <p:cNvSpPr/>
           <p:nvPr/>
@@ -15779,7 +15884,7 @@
         </p:nvSpPr>
         <p:spPr bwMode="auto">
           <a:xfrm>
-            <a:off x="609600" y="1638788"/>
+            <a:off x="609600" y="1573463"/>
             <a:ext cx="6858000" cy="2031325"/>
           </a:xfrm>
           <a:prstGeom prst="rect">
@@ -16050,6 +16155,278 @@
   <p:clrMapOvr>
     <a:masterClrMapping/>
   </p:clrMapOvr>
+  <p:timing>
+    <p:tnLst>
+      <p:par>
+        <p:cTn id="1" dur="indefinite" restart="never" nodeType="tmRoot">
+          <p:childTnLst>
+            <p:seq concurrent="1" nextAc="seek">
+              <p:cTn id="2" dur="indefinite" nodeType="mainSeq">
+                <p:childTnLst>
+                  <p:par>
+                    <p:cTn id="3" fill="hold">
+                      <p:stCondLst>
+                        <p:cond delay="indefinite"/>
+                      </p:stCondLst>
+                      <p:childTnLst>
+                        <p:par>
+                          <p:cTn id="4" fill="hold">
+                            <p:stCondLst>
+                              <p:cond delay="0"/>
+                            </p:stCondLst>
+                            <p:childTnLst>
+                              <p:par>
+                                <p:cTn id="5" presetID="1" presetClass="entr" presetSubtype="0" fill="hold" grpId="0" nodeType="clickEffect">
+                                  <p:stCondLst>
+                                    <p:cond delay="0"/>
+                                  </p:stCondLst>
+                                  <p:childTnLst>
+                                    <p:set>
+                                      <p:cBhvr>
+                                        <p:cTn id="6" dur="1" fill="hold">
+                                          <p:stCondLst>
+                                            <p:cond delay="0"/>
+                                          </p:stCondLst>
+                                        </p:cTn>
+                                        <p:tgtEl>
+                                          <p:spTgt spid="13"/>
+                                        </p:tgtEl>
+                                        <p:attrNameLst>
+                                          <p:attrName>style.visibility</p:attrName>
+                                        </p:attrNameLst>
+                                      </p:cBhvr>
+                                      <p:to>
+                                        <p:strVal val="visible"/>
+                                      </p:to>
+                                    </p:set>
+                                  </p:childTnLst>
+                                </p:cTn>
+                              </p:par>
+                            </p:childTnLst>
+                          </p:cTn>
+                        </p:par>
+                      </p:childTnLst>
+                    </p:cTn>
+                  </p:par>
+                  <p:par>
+                    <p:cTn id="7" fill="hold">
+                      <p:stCondLst>
+                        <p:cond delay="indefinite"/>
+                      </p:stCondLst>
+                      <p:childTnLst>
+                        <p:par>
+                          <p:cTn id="8" fill="hold">
+                            <p:stCondLst>
+                              <p:cond delay="0"/>
+                            </p:stCondLst>
+                            <p:childTnLst>
+                              <p:par>
+                                <p:cTn id="9" presetID="1" presetClass="entr" presetSubtype="0" fill="hold" grpId="0" nodeType="clickEffect">
+                                  <p:stCondLst>
+                                    <p:cond delay="0"/>
+                                  </p:stCondLst>
+                                  <p:childTnLst>
+                                    <p:set>
+                                      <p:cBhvr>
+                                        <p:cTn id="10" dur="1" fill="hold">
+                                          <p:stCondLst>
+                                            <p:cond delay="0"/>
+                                          </p:stCondLst>
+                                        </p:cTn>
+                                        <p:tgtEl>
+                                          <p:spTgt spid="31748"/>
+                                        </p:tgtEl>
+                                        <p:attrNameLst>
+                                          <p:attrName>style.visibility</p:attrName>
+                                        </p:attrNameLst>
+                                      </p:cBhvr>
+                                      <p:to>
+                                        <p:strVal val="visible"/>
+                                      </p:to>
+                                    </p:set>
+                                  </p:childTnLst>
+                                </p:cTn>
+                              </p:par>
+                            </p:childTnLst>
+                          </p:cTn>
+                        </p:par>
+                      </p:childTnLst>
+                    </p:cTn>
+                  </p:par>
+                  <p:par>
+                    <p:cTn id="11" fill="hold">
+                      <p:stCondLst>
+                        <p:cond delay="indefinite"/>
+                      </p:stCondLst>
+                      <p:childTnLst>
+                        <p:par>
+                          <p:cTn id="12" fill="hold">
+                            <p:stCondLst>
+                              <p:cond delay="0"/>
+                            </p:stCondLst>
+                            <p:childTnLst>
+                              <p:par>
+                                <p:cTn id="13" presetID="1" presetClass="entr" presetSubtype="0" fill="hold" grpId="0" nodeType="clickEffect">
+                                  <p:stCondLst>
+                                    <p:cond delay="0"/>
+                                  </p:stCondLst>
+                                  <p:childTnLst>
+                                    <p:set>
+                                      <p:cBhvr>
+                                        <p:cTn id="14" dur="1" fill="hold">
+                                          <p:stCondLst>
+                                            <p:cond delay="0"/>
+                                          </p:stCondLst>
+                                        </p:cTn>
+                                        <p:tgtEl>
+                                          <p:spTgt spid="11"/>
+                                        </p:tgtEl>
+                                        <p:attrNameLst>
+                                          <p:attrName>style.visibility</p:attrName>
+                                        </p:attrNameLst>
+                                      </p:cBhvr>
+                                      <p:to>
+                                        <p:strVal val="visible"/>
+                                      </p:to>
+                                    </p:set>
+                                  </p:childTnLst>
+                                </p:cTn>
+                              </p:par>
+                              <p:par>
+                                <p:cTn id="15" presetID="1" presetClass="entr" presetSubtype="0" fill="hold" grpId="0" nodeType="withEffect">
+                                  <p:stCondLst>
+                                    <p:cond delay="0"/>
+                                  </p:stCondLst>
+                                  <p:childTnLst>
+                                    <p:set>
+                                      <p:cBhvr>
+                                        <p:cTn id="16" dur="1" fill="hold">
+                                          <p:stCondLst>
+                                            <p:cond delay="0"/>
+                                          </p:stCondLst>
+                                        </p:cTn>
+                                        <p:tgtEl>
+                                          <p:spTgt spid="9"/>
+                                        </p:tgtEl>
+                                        <p:attrNameLst>
+                                          <p:attrName>style.visibility</p:attrName>
+                                        </p:attrNameLst>
+                                      </p:cBhvr>
+                                      <p:to>
+                                        <p:strVal val="visible"/>
+                                      </p:to>
+                                    </p:set>
+                                  </p:childTnLst>
+                                </p:cTn>
+                              </p:par>
+                            </p:childTnLst>
+                          </p:cTn>
+                        </p:par>
+                      </p:childTnLst>
+                    </p:cTn>
+                  </p:par>
+                  <p:par>
+                    <p:cTn id="17" fill="hold">
+                      <p:stCondLst>
+                        <p:cond delay="indefinite"/>
+                      </p:stCondLst>
+                      <p:childTnLst>
+                        <p:par>
+                          <p:cTn id="18" fill="hold">
+                            <p:stCondLst>
+                              <p:cond delay="0"/>
+                            </p:stCondLst>
+                            <p:childTnLst>
+                              <p:par>
+                                <p:cTn id="19" presetID="1" presetClass="entr" presetSubtype="0" fill="hold" grpId="0" nodeType="clickEffect">
+                                  <p:stCondLst>
+                                    <p:cond delay="0"/>
+                                  </p:stCondLst>
+                                  <p:childTnLst>
+                                    <p:set>
+                                      <p:cBhvr>
+                                        <p:cTn id="20" dur="1" fill="hold">
+                                          <p:stCondLst>
+                                            <p:cond delay="0"/>
+                                          </p:stCondLst>
+                                        </p:cTn>
+                                        <p:tgtEl>
+                                          <p:spTgt spid="12"/>
+                                        </p:tgtEl>
+                                        <p:attrNameLst>
+                                          <p:attrName>style.visibility</p:attrName>
+                                        </p:attrNameLst>
+                                      </p:cBhvr>
+                                      <p:to>
+                                        <p:strVal val="visible"/>
+                                      </p:to>
+                                    </p:set>
+                                  </p:childTnLst>
+                                </p:cTn>
+                              </p:par>
+                              <p:par>
+                                <p:cTn id="21" presetID="1" presetClass="entr" presetSubtype="0" fill="hold" grpId="0" nodeType="withEffect">
+                                  <p:stCondLst>
+                                    <p:cond delay="0"/>
+                                  </p:stCondLst>
+                                  <p:childTnLst>
+                                    <p:set>
+                                      <p:cBhvr>
+                                        <p:cTn id="22" dur="1" fill="hold">
+                                          <p:stCondLst>
+                                            <p:cond delay="0"/>
+                                          </p:stCondLst>
+                                        </p:cTn>
+                                        <p:tgtEl>
+                                          <p:spTgt spid="8"/>
+                                        </p:tgtEl>
+                                        <p:attrNameLst>
+                                          <p:attrName>style.visibility</p:attrName>
+                                        </p:attrNameLst>
+                                      </p:cBhvr>
+                                      <p:to>
+                                        <p:strVal val="visible"/>
+                                      </p:to>
+                                    </p:set>
+                                  </p:childTnLst>
+                                </p:cTn>
+                              </p:par>
+                            </p:childTnLst>
+                          </p:cTn>
+                        </p:par>
+                      </p:childTnLst>
+                    </p:cTn>
+                  </p:par>
+                </p:childTnLst>
+              </p:cTn>
+              <p:prevCondLst>
+                <p:cond evt="onPrev" delay="0">
+                  <p:tgtEl>
+                    <p:sldTgt/>
+                  </p:tgtEl>
+                </p:cond>
+              </p:prevCondLst>
+              <p:nextCondLst>
+                <p:cond evt="onNext" delay="0">
+                  <p:tgtEl>
+                    <p:sldTgt/>
+                  </p:tgtEl>
+                </p:cond>
+              </p:nextCondLst>
+            </p:seq>
+          </p:childTnLst>
+        </p:cTn>
+      </p:par>
+    </p:tnLst>
+    <p:bldLst>
+      <p:bldP spid="31748" grpId="0" animBg="1"/>
+      <p:bldP spid="8" grpId="0" animBg="1"/>
+      <p:bldP spid="9" grpId="0" animBg="1"/>
+      <p:bldP spid="11" grpId="0" animBg="1"/>
+      <p:bldP spid="12" grpId="0" animBg="1"/>
+      <p:bldP spid="13" grpId="0" animBg="1"/>
+    </p:bldLst>
+  </p:timing>
 </p:sld>
 </file>
 
@@ -17165,6 +17542,87 @@
   <p:clrMapOvr>
     <a:masterClrMapping/>
   </p:clrMapOvr>
+  <p:timing>
+    <p:tnLst>
+      <p:par>
+        <p:cTn id="1" dur="indefinite" restart="never" nodeType="tmRoot">
+          <p:childTnLst>
+            <p:seq concurrent="1" nextAc="seek">
+              <p:cTn id="2" dur="indefinite" nodeType="mainSeq">
+                <p:childTnLst>
+                  <p:par>
+                    <p:cTn id="3" fill="hold">
+                      <p:stCondLst>
+                        <p:cond delay="indefinite"/>
+                        <p:cond evt="onBegin" delay="0">
+                          <p:tn val="2"/>
+                        </p:cond>
+                      </p:stCondLst>
+                      <p:childTnLst>
+                        <p:par>
+                          <p:cTn id="4" fill="hold">
+                            <p:stCondLst>
+                              <p:cond delay="0"/>
+                            </p:stCondLst>
+                            <p:childTnLst>
+                              <p:par>
+                                <p:cTn id="5" presetID="1" presetClass="entr" presetSubtype="0" fill="hold" grpId="0" nodeType="withEffect">
+                                  <p:stCondLst>
+                                    <p:cond delay="2000"/>
+                                  </p:stCondLst>
+                                  <p:childTnLst>
+                                    <p:set>
+                                      <p:cBhvr>
+                                        <p:cTn id="6" dur="1" fill="hold">
+                                          <p:stCondLst>
+                                            <p:cond delay="0"/>
+                                          </p:stCondLst>
+                                        </p:cTn>
+                                        <p:tgtEl>
+                                          <p:spTgt spid="5"/>
+                                        </p:tgtEl>
+                                        <p:attrNameLst>
+                                          <p:attrName>style.visibility</p:attrName>
+                                        </p:attrNameLst>
+                                      </p:cBhvr>
+                                      <p:to>
+                                        <p:strVal val="visible"/>
+                                      </p:to>
+                                    </p:set>
+                                  </p:childTnLst>
+                                </p:cTn>
+                              </p:par>
+                            </p:childTnLst>
+                          </p:cTn>
+                        </p:par>
+                      </p:childTnLst>
+                    </p:cTn>
+                  </p:par>
+                </p:childTnLst>
+              </p:cTn>
+              <p:prevCondLst>
+                <p:cond evt="onPrev" delay="0">
+                  <p:tgtEl>
+                    <p:sldTgt/>
+                  </p:tgtEl>
+                </p:cond>
+              </p:prevCondLst>
+              <p:nextCondLst>
+                <p:cond evt="onNext" delay="0">
+                  <p:tgtEl>
+                    <p:sldTgt/>
+                  </p:tgtEl>
+                </p:cond>
+              </p:nextCondLst>
+            </p:seq>
+          </p:childTnLst>
+        </p:cTn>
+      </p:par>
+    </p:tnLst>
+    <p:bldLst>
+      <p:bldP spid="5" grpId="0" animBg="1"/>
+    </p:bldLst>
+  </p:timing>
 </p:sld>
 </file>
 
@@ -17276,16 +17734,7 @@
             </a:pPr>
             <a:r>
               <a:rPr lang="en-GB" sz="3200" dirty="0"/>
-              <a:t>they can hold objects </a:t>
-            </a:r>
-          </a:p>
-          <a:p>
-            <a:pPr lvl="2">
-              <a:defRPr/>
-            </a:pPr>
-            <a:r>
-              <a:rPr lang="en-GB" sz="2800" dirty="0"/>
-              <a:t>of more than one type</a:t>
+              <a:t>they can hold objects of more than one type</a:t>
             </a:r>
           </a:p>
           <a:p>
@@ -17321,6 +17770,134 @@
   <p:clrMapOvr>
     <a:masterClrMapping/>
   </p:clrMapOvr>
+  <p:timing>
+    <p:tnLst>
+      <p:par>
+        <p:cTn id="1" dur="indefinite" restart="never" nodeType="tmRoot">
+          <p:childTnLst>
+            <p:seq concurrent="1" nextAc="seek">
+              <p:cTn id="2" dur="indefinite" nodeType="mainSeq">
+                <p:childTnLst>
+                  <p:par>
+                    <p:cTn id="3" fill="hold">
+                      <p:stCondLst>
+                        <p:cond delay="indefinite"/>
+                      </p:stCondLst>
+                      <p:childTnLst>
+                        <p:par>
+                          <p:cTn id="4" fill="hold">
+                            <p:stCondLst>
+                              <p:cond delay="0"/>
+                            </p:stCondLst>
+                            <p:childTnLst>
+                              <p:par>
+                                <p:cTn id="5" presetID="1" presetClass="entr" presetSubtype="0" fill="hold" nodeType="clickEffect">
+                                  <p:stCondLst>
+                                    <p:cond delay="0"/>
+                                  </p:stCondLst>
+                                  <p:childTnLst>
+                                    <p:set>
+                                      <p:cBhvr>
+                                        <p:cTn id="6" dur="1" fill="hold">
+                                          <p:stCondLst>
+                                            <p:cond delay="0"/>
+                                          </p:stCondLst>
+                                        </p:cTn>
+                                        <p:tgtEl>
+                                          <p:spTgt spid="194564">
+                                            <p:txEl>
+                                              <p:pRg st="3" end="3"/>
+                                            </p:txEl>
+                                          </p:spTgt>
+                                        </p:tgtEl>
+                                        <p:attrNameLst>
+                                          <p:attrName>style.visibility</p:attrName>
+                                        </p:attrNameLst>
+                                      </p:cBhvr>
+                                      <p:to>
+                                        <p:strVal val="visible"/>
+                                      </p:to>
+                                    </p:set>
+                                  </p:childTnLst>
+                                </p:cTn>
+                              </p:par>
+                            </p:childTnLst>
+                          </p:cTn>
+                        </p:par>
+                      </p:childTnLst>
+                    </p:cTn>
+                  </p:par>
+                  <p:par>
+                    <p:cTn id="7" fill="hold">
+                      <p:stCondLst>
+                        <p:cond delay="indefinite"/>
+                      </p:stCondLst>
+                      <p:childTnLst>
+                        <p:par>
+                          <p:cTn id="8" fill="hold">
+                            <p:stCondLst>
+                              <p:cond delay="0"/>
+                            </p:stCondLst>
+                            <p:childTnLst>
+                              <p:par>
+                                <p:cTn id="9" presetID="1" presetClass="entr" presetSubtype="0" fill="hold" nodeType="clickEffect">
+                                  <p:stCondLst>
+                                    <p:cond delay="0"/>
+                                  </p:stCondLst>
+                                  <p:childTnLst>
+                                    <p:set>
+                                      <p:cBhvr>
+                                        <p:cTn id="10" dur="1" fill="hold">
+                                          <p:stCondLst>
+                                            <p:cond delay="0"/>
+                                          </p:stCondLst>
+                                        </p:cTn>
+                                        <p:tgtEl>
+                                          <p:spTgt spid="194564">
+                                            <p:txEl>
+                                              <p:pRg st="4" end="4"/>
+                                            </p:txEl>
+                                          </p:spTgt>
+                                        </p:tgtEl>
+                                        <p:attrNameLst>
+                                          <p:attrName>style.visibility</p:attrName>
+                                        </p:attrNameLst>
+                                      </p:cBhvr>
+                                      <p:to>
+                                        <p:strVal val="visible"/>
+                                      </p:to>
+                                    </p:set>
+                                  </p:childTnLst>
+                                </p:cTn>
+                              </p:par>
+                            </p:childTnLst>
+                          </p:cTn>
+                        </p:par>
+                      </p:childTnLst>
+                    </p:cTn>
+                  </p:par>
+                </p:childTnLst>
+              </p:cTn>
+              <p:prevCondLst>
+                <p:cond evt="onPrev" delay="0">
+                  <p:tgtEl>
+                    <p:sldTgt/>
+                  </p:tgtEl>
+                </p:cond>
+              </p:prevCondLst>
+              <p:nextCondLst>
+                <p:cond evt="onNext" delay="0">
+                  <p:tgtEl>
+                    <p:sldTgt/>
+                  </p:tgtEl>
+                </p:cond>
+              </p:nextCondLst>
+            </p:seq>
+          </p:childTnLst>
+        </p:cTn>
+      </p:par>
+    </p:tnLst>
+  </p:timing>
 </p:sld>
 </file>
 
@@ -18441,7 +19018,7 @@
           <a:p>
             <a:pPr algn="ctr"/>
             <a:r>
-              <a:rPr lang="en-GB" altLang="en-US" sz="2000" b="1"/>
+              <a:rPr lang="en-GB" altLang="en-US" sz="2000" b="1" dirty="0"/>
               <a:t>Without (CASTING)</a:t>
             </a:r>
             <a:endParaRPr lang="en-IE" sz="2000" dirty="0"/>
@@ -18561,6 +19138,416 @@
   <p:clrMapOvr>
     <a:masterClrMapping/>
   </p:clrMapOvr>
+  <p:timing>
+    <p:tnLst>
+      <p:par>
+        <p:cTn id="1" dur="indefinite" restart="never" nodeType="tmRoot">
+          <p:childTnLst>
+            <p:seq concurrent="1" nextAc="seek">
+              <p:cTn id="2" dur="indefinite" nodeType="mainSeq">
+                <p:childTnLst>
+                  <p:par>
+                    <p:cTn id="3" fill="hold">
+                      <p:stCondLst>
+                        <p:cond delay="indefinite"/>
+                      </p:stCondLst>
+                      <p:childTnLst>
+                        <p:par>
+                          <p:cTn id="4" fill="hold">
+                            <p:stCondLst>
+                              <p:cond delay="0"/>
+                            </p:stCondLst>
+                            <p:childTnLst>
+                              <p:par>
+                                <p:cTn id="5" presetID="1" presetClass="entr" presetSubtype="0" fill="hold" grpId="0" nodeType="clickEffect">
+                                  <p:stCondLst>
+                                    <p:cond delay="0"/>
+                                  </p:stCondLst>
+                                  <p:childTnLst>
+                                    <p:set>
+                                      <p:cBhvr>
+                                        <p:cTn id="6" dur="1" fill="hold">
+                                          <p:stCondLst>
+                                            <p:cond delay="0"/>
+                                          </p:stCondLst>
+                                        </p:cTn>
+                                        <p:tgtEl>
+                                          <p:spTgt spid="2"/>
+                                        </p:tgtEl>
+                                        <p:attrNameLst>
+                                          <p:attrName>style.visibility</p:attrName>
+                                        </p:attrNameLst>
+                                      </p:cBhvr>
+                                      <p:to>
+                                        <p:strVal val="visible"/>
+                                      </p:to>
+                                    </p:set>
+                                  </p:childTnLst>
+                                </p:cTn>
+                              </p:par>
+                            </p:childTnLst>
+                          </p:cTn>
+                        </p:par>
+                      </p:childTnLst>
+                    </p:cTn>
+                  </p:par>
+                  <p:par>
+                    <p:cTn id="7" fill="hold">
+                      <p:stCondLst>
+                        <p:cond delay="indefinite"/>
+                      </p:stCondLst>
+                      <p:childTnLst>
+                        <p:par>
+                          <p:cTn id="8" fill="hold">
+                            <p:stCondLst>
+                              <p:cond delay="0"/>
+                            </p:stCondLst>
+                            <p:childTnLst>
+                              <p:par>
+                                <p:cTn id="9" presetID="1" presetClass="entr" presetSubtype="0" fill="hold" grpId="0" nodeType="clickEffect">
+                                  <p:stCondLst>
+                                    <p:cond delay="0"/>
+                                  </p:stCondLst>
+                                  <p:childTnLst>
+                                    <p:set>
+                                      <p:cBhvr>
+                                        <p:cTn id="10" dur="1" fill="hold">
+                                          <p:stCondLst>
+                                            <p:cond delay="0"/>
+                                          </p:stCondLst>
+                                        </p:cTn>
+                                        <p:tgtEl>
+                                          <p:spTgt spid="3"/>
+                                        </p:tgtEl>
+                                        <p:attrNameLst>
+                                          <p:attrName>style.visibility</p:attrName>
+                                        </p:attrNameLst>
+                                      </p:cBhvr>
+                                      <p:to>
+                                        <p:strVal val="visible"/>
+                                      </p:to>
+                                    </p:set>
+                                  </p:childTnLst>
+                                </p:cTn>
+                              </p:par>
+                            </p:childTnLst>
+                          </p:cTn>
+                        </p:par>
+                      </p:childTnLst>
+                    </p:cTn>
+                  </p:par>
+                  <p:par>
+                    <p:cTn id="11" fill="hold">
+                      <p:stCondLst>
+                        <p:cond delay="indefinite"/>
+                      </p:stCondLst>
+                      <p:childTnLst>
+                        <p:par>
+                          <p:cTn id="12" fill="hold">
+                            <p:stCondLst>
+                              <p:cond delay="0"/>
+                            </p:stCondLst>
+                            <p:childTnLst>
+                              <p:par>
+                                <p:cTn id="13" presetID="1" presetClass="entr" presetSubtype="0" fill="hold" grpId="0" nodeType="clickEffect">
+                                  <p:stCondLst>
+                                    <p:cond delay="0"/>
+                                  </p:stCondLst>
+                                  <p:childTnLst>
+                                    <p:set>
+                                      <p:cBhvr>
+                                        <p:cTn id="14" dur="1" fill="hold">
+                                          <p:stCondLst>
+                                            <p:cond delay="0"/>
+                                          </p:stCondLst>
+                                        </p:cTn>
+                                        <p:tgtEl>
+                                          <p:spTgt spid="5"/>
+                                        </p:tgtEl>
+                                        <p:attrNameLst>
+                                          <p:attrName>style.visibility</p:attrName>
+                                        </p:attrNameLst>
+                                      </p:cBhvr>
+                                      <p:to>
+                                        <p:strVal val="visible"/>
+                                      </p:to>
+                                    </p:set>
+                                  </p:childTnLst>
+                                </p:cTn>
+                              </p:par>
+                            </p:childTnLst>
+                          </p:cTn>
+                        </p:par>
+                      </p:childTnLst>
+                    </p:cTn>
+                  </p:par>
+                  <p:par>
+                    <p:cTn id="15" fill="hold">
+                      <p:stCondLst>
+                        <p:cond delay="indefinite"/>
+                      </p:stCondLst>
+                      <p:childTnLst>
+                        <p:par>
+                          <p:cTn id="16" fill="hold">
+                            <p:stCondLst>
+                              <p:cond delay="0"/>
+                            </p:stCondLst>
+                            <p:childTnLst>
+                              <p:par>
+                                <p:cTn id="17" presetID="1" presetClass="entr" presetSubtype="0" fill="hold" grpId="0" nodeType="clickEffect">
+                                  <p:stCondLst>
+                                    <p:cond delay="0"/>
+                                  </p:stCondLst>
+                                  <p:childTnLst>
+                                    <p:set>
+                                      <p:cBhvr>
+                                        <p:cTn id="18" dur="1" fill="hold">
+                                          <p:stCondLst>
+                                            <p:cond delay="0"/>
+                                          </p:stCondLst>
+                                        </p:cTn>
+                                        <p:tgtEl>
+                                          <p:spTgt spid="7"/>
+                                        </p:tgtEl>
+                                        <p:attrNameLst>
+                                          <p:attrName>style.visibility</p:attrName>
+                                        </p:attrNameLst>
+                                      </p:cBhvr>
+                                      <p:to>
+                                        <p:strVal val="visible"/>
+                                      </p:to>
+                                    </p:set>
+                                  </p:childTnLst>
+                                </p:cTn>
+                              </p:par>
+                            </p:childTnLst>
+                          </p:cTn>
+                        </p:par>
+                      </p:childTnLst>
+                    </p:cTn>
+                  </p:par>
+                  <p:par>
+                    <p:cTn id="19" fill="hold">
+                      <p:stCondLst>
+                        <p:cond delay="indefinite"/>
+                      </p:stCondLst>
+                      <p:childTnLst>
+                        <p:par>
+                          <p:cTn id="20" fill="hold">
+                            <p:stCondLst>
+                              <p:cond delay="0"/>
+                            </p:stCondLst>
+                            <p:childTnLst>
+                              <p:par>
+                                <p:cTn id="21" presetID="1" presetClass="entr" presetSubtype="0" fill="hold" grpId="0" nodeType="clickEffect">
+                                  <p:stCondLst>
+                                    <p:cond delay="0"/>
+                                  </p:stCondLst>
+                                  <p:childTnLst>
+                                    <p:set>
+                                      <p:cBhvr>
+                                        <p:cTn id="22" dur="1" fill="hold">
+                                          <p:stCondLst>
+                                            <p:cond delay="0"/>
+                                          </p:stCondLst>
+                                        </p:cTn>
+                                        <p:tgtEl>
+                                          <p:spTgt spid="8"/>
+                                        </p:tgtEl>
+                                        <p:attrNameLst>
+                                          <p:attrName>style.visibility</p:attrName>
+                                        </p:attrNameLst>
+                                      </p:cBhvr>
+                                      <p:to>
+                                        <p:strVal val="visible"/>
+                                      </p:to>
+                                    </p:set>
+                                  </p:childTnLst>
+                                </p:cTn>
+                              </p:par>
+                            </p:childTnLst>
+                          </p:cTn>
+                        </p:par>
+                      </p:childTnLst>
+                    </p:cTn>
+                  </p:par>
+                  <p:par>
+                    <p:cTn id="23" fill="hold">
+                      <p:stCondLst>
+                        <p:cond delay="indefinite"/>
+                      </p:stCondLst>
+                      <p:childTnLst>
+                        <p:par>
+                          <p:cTn id="24" fill="hold">
+                            <p:stCondLst>
+                              <p:cond delay="0"/>
+                            </p:stCondLst>
+                            <p:childTnLst>
+                              <p:par>
+                                <p:cTn id="25" presetID="1" presetClass="entr" presetSubtype="0" fill="hold" grpId="0" nodeType="clickEffect">
+                                  <p:stCondLst>
+                                    <p:cond delay="0"/>
+                                  </p:stCondLst>
+                                  <p:childTnLst>
+                                    <p:set>
+                                      <p:cBhvr>
+                                        <p:cTn id="26" dur="1" fill="hold">
+                                          <p:stCondLst>
+                                            <p:cond delay="0"/>
+                                          </p:stCondLst>
+                                        </p:cTn>
+                                        <p:tgtEl>
+                                          <p:spTgt spid="6"/>
+                                        </p:tgtEl>
+                                        <p:attrNameLst>
+                                          <p:attrName>style.visibility</p:attrName>
+                                        </p:attrNameLst>
+                                      </p:cBhvr>
+                                      <p:to>
+                                        <p:strVal val="visible"/>
+                                      </p:to>
+                                    </p:set>
+                                  </p:childTnLst>
+                                </p:cTn>
+                              </p:par>
+                              <p:par>
+                                <p:cTn id="27" presetID="1" presetClass="entr" presetSubtype="0" fill="hold" grpId="0" nodeType="withEffect">
+                                  <p:stCondLst>
+                                    <p:cond delay="0"/>
+                                  </p:stCondLst>
+                                  <p:childTnLst>
+                                    <p:set>
+                                      <p:cBhvr>
+                                        <p:cTn id="28" dur="1" fill="hold">
+                                          <p:stCondLst>
+                                            <p:cond delay="0"/>
+                                          </p:stCondLst>
+                                        </p:cTn>
+                                        <p:tgtEl>
+                                          <p:spTgt spid="11"/>
+                                        </p:tgtEl>
+                                        <p:attrNameLst>
+                                          <p:attrName>style.visibility</p:attrName>
+                                        </p:attrNameLst>
+                                      </p:cBhvr>
+                                      <p:to>
+                                        <p:strVal val="visible"/>
+                                      </p:to>
+                                    </p:set>
+                                  </p:childTnLst>
+                                </p:cTn>
+                              </p:par>
+                            </p:childTnLst>
+                          </p:cTn>
+                        </p:par>
+                      </p:childTnLst>
+                    </p:cTn>
+                  </p:par>
+                  <p:par>
+                    <p:cTn id="29" fill="hold">
+                      <p:stCondLst>
+                        <p:cond delay="indefinite"/>
+                      </p:stCondLst>
+                      <p:childTnLst>
+                        <p:par>
+                          <p:cTn id="30" fill="hold">
+                            <p:stCondLst>
+                              <p:cond delay="0"/>
+                            </p:stCondLst>
+                            <p:childTnLst>
+                              <p:par>
+                                <p:cTn id="31" presetID="1" presetClass="entr" presetSubtype="0" fill="hold" grpId="0" nodeType="clickEffect">
+                                  <p:stCondLst>
+                                    <p:cond delay="0"/>
+                                  </p:stCondLst>
+                                  <p:childTnLst>
+                                    <p:set>
+                                      <p:cBhvr>
+                                        <p:cTn id="32" dur="1" fill="hold">
+                                          <p:stCondLst>
+                                            <p:cond delay="0"/>
+                                          </p:stCondLst>
+                                        </p:cTn>
+                                        <p:tgtEl>
+                                          <p:spTgt spid="4"/>
+                                        </p:tgtEl>
+                                        <p:attrNameLst>
+                                          <p:attrName>style.visibility</p:attrName>
+                                        </p:attrNameLst>
+                                      </p:cBhvr>
+                                      <p:to>
+                                        <p:strVal val="visible"/>
+                                      </p:to>
+                                    </p:set>
+                                  </p:childTnLst>
+                                </p:cTn>
+                              </p:par>
+                              <p:par>
+                                <p:cTn id="33" presetID="1" presetClass="entr" presetSubtype="0" fill="hold" grpId="0" nodeType="withEffect">
+                                  <p:stCondLst>
+                                    <p:cond delay="0"/>
+                                  </p:stCondLst>
+                                  <p:childTnLst>
+                                    <p:set>
+                                      <p:cBhvr>
+                                        <p:cTn id="34" dur="1" fill="hold">
+                                          <p:stCondLst>
+                                            <p:cond delay="0"/>
+                                          </p:stCondLst>
+                                        </p:cTn>
+                                        <p:tgtEl>
+                                          <p:spTgt spid="12"/>
+                                        </p:tgtEl>
+                                        <p:attrNameLst>
+                                          <p:attrName>style.visibility</p:attrName>
+                                        </p:attrNameLst>
+                                      </p:cBhvr>
+                                      <p:to>
+                                        <p:strVal val="visible"/>
+                                      </p:to>
+                                    </p:set>
+                                  </p:childTnLst>
+                                </p:cTn>
+                              </p:par>
+                            </p:childTnLst>
+                          </p:cTn>
+                        </p:par>
+                      </p:childTnLst>
+                    </p:cTn>
+                  </p:par>
+                </p:childTnLst>
+              </p:cTn>
+              <p:prevCondLst>
+                <p:cond evt="onPrev" delay="0">
+                  <p:tgtEl>
+                    <p:sldTgt/>
+                  </p:tgtEl>
+                </p:cond>
+              </p:prevCondLst>
+              <p:nextCondLst>
+                <p:cond evt="onNext" delay="0">
+                  <p:tgtEl>
+                    <p:sldTgt/>
+                  </p:tgtEl>
+                </p:cond>
+              </p:nextCondLst>
+            </p:seq>
+          </p:childTnLst>
+        </p:cTn>
+      </p:par>
+    </p:tnLst>
+    <p:bldLst>
+      <p:bldP spid="2" grpId="0" animBg="1"/>
+      <p:bldP spid="3" grpId="0" animBg="1"/>
+      <p:bldP spid="4" grpId="0"/>
+      <p:bldP spid="5" grpId="0"/>
+      <p:bldP spid="7" grpId="0"/>
+      <p:bldP spid="8" grpId="0"/>
+      <p:bldP spid="11" grpId="0" animBg="1"/>
+      <p:bldP spid="12" grpId="0" animBg="1"/>
+      <p:bldP spid="6" grpId="0" animBg="1"/>
+    </p:bldLst>
+  </p:timing>
 </p:sld>
 </file>
 
@@ -18635,13 +19622,13 @@
               <a:defRPr/>
             </a:pPr>
             <a:r>
-              <a:rPr lang="en-GB">
+              <a:rPr lang="en-GB" dirty="0">
                 <a:ea typeface="+mn-ea"/>
                 <a:cs typeface="+mn-cs"/>
               </a:rPr>
               <a:t>An object type in parentheses.</a:t>
             </a:r>
-            <a:endParaRPr lang="en-GB" sz="2400" b="1">
+            <a:endParaRPr lang="en-GB" sz="2400" b="1" dirty="0">
               <a:latin typeface="Courier New" pitchFamily="-32" charset="0"/>
             </a:endParaRPr>
           </a:p>
@@ -18650,7 +19637,7 @@
               <a:defRPr/>
             </a:pPr>
             <a:r>
-              <a:rPr lang="en-GB">
+              <a:rPr lang="en-GB" dirty="0">
                 <a:ea typeface="+mn-ea"/>
                 <a:cs typeface="+mn-cs"/>
               </a:rPr>
@@ -18662,7 +19649,7 @@
               <a:defRPr/>
             </a:pPr>
             <a:r>
-              <a:rPr lang="en-GB">
+              <a:rPr lang="en-GB" dirty="0">
                 <a:ea typeface="+mn-ea"/>
                 <a:cs typeface="+mn-cs"/>
               </a:rPr>
@@ -18674,7 +19661,7 @@
               <a:defRPr/>
             </a:pPr>
             <a:r>
-              <a:rPr lang="en-GB">
+              <a:rPr lang="en-GB" dirty="0">
                 <a:ea typeface="+mn-ea"/>
                 <a:cs typeface="+mn-cs"/>
               </a:rPr>
@@ -18686,14 +19673,14 @@
               <a:defRPr/>
             </a:pPr>
             <a:r>
-              <a:rPr lang="en-GB" b="1">
+              <a:rPr lang="en-GB" b="1" dirty="0" err="1">
                 <a:latin typeface="Courier New" pitchFamily="-32" charset="0"/>
                 <a:ea typeface="+mn-ea"/>
               </a:rPr>
               <a:t>ClassCastException</a:t>
             </a:r>
             <a:r>
-              <a:rPr lang="en-GB">
+              <a:rPr lang="en-GB" dirty="0">
                 <a:ea typeface="+mn-ea"/>
               </a:rPr>
               <a:t> if it isn't!</a:t>
@@ -18704,7 +19691,7 @@
               <a:defRPr/>
             </a:pPr>
             <a:r>
-              <a:rPr lang="en-GB">
+              <a:rPr lang="en-GB" dirty="0">
                 <a:ea typeface="+mn-ea"/>
                 <a:cs typeface="+mn-cs"/>
               </a:rPr>
@@ -18726,6 +19713,312 @@
   <p:clrMapOvr>
     <a:masterClrMapping/>
   </p:clrMapOvr>
+  <p:timing>
+    <p:tnLst>
+      <p:par>
+        <p:cTn id="1" dur="indefinite" restart="never" nodeType="tmRoot">
+          <p:childTnLst>
+            <p:seq concurrent="1" nextAc="seek">
+              <p:cTn id="2" dur="indefinite" nodeType="mainSeq">
+                <p:childTnLst>
+                  <p:par>
+                    <p:cTn id="3" fill="hold">
+                      <p:stCondLst>
+                        <p:cond delay="indefinite"/>
+                      </p:stCondLst>
+                      <p:childTnLst>
+                        <p:par>
+                          <p:cTn id="4" fill="hold">
+                            <p:stCondLst>
+                              <p:cond delay="0"/>
+                            </p:stCondLst>
+                            <p:childTnLst>
+                              <p:par>
+                                <p:cTn id="5" presetID="1" presetClass="entr" presetSubtype="0" fill="hold" nodeType="clickEffect">
+                                  <p:stCondLst>
+                                    <p:cond delay="0"/>
+                                  </p:stCondLst>
+                                  <p:childTnLst>
+                                    <p:set>
+                                      <p:cBhvr>
+                                        <p:cTn id="6" dur="1" fill="hold">
+                                          <p:stCondLst>
+                                            <p:cond delay="0"/>
+                                          </p:stCondLst>
+                                        </p:cTn>
+                                        <p:tgtEl>
+                                          <p:spTgt spid="271363">
+                                            <p:txEl>
+                                              <p:pRg st="0" end="0"/>
+                                            </p:txEl>
+                                          </p:spTgt>
+                                        </p:tgtEl>
+                                        <p:attrNameLst>
+                                          <p:attrName>style.visibility</p:attrName>
+                                        </p:attrNameLst>
+                                      </p:cBhvr>
+                                      <p:to>
+                                        <p:strVal val="visible"/>
+                                      </p:to>
+                                    </p:set>
+                                  </p:childTnLst>
+                                </p:cTn>
+                              </p:par>
+                            </p:childTnLst>
+                          </p:cTn>
+                        </p:par>
+                      </p:childTnLst>
+                    </p:cTn>
+                  </p:par>
+                  <p:par>
+                    <p:cTn id="7" fill="hold">
+                      <p:stCondLst>
+                        <p:cond delay="indefinite"/>
+                      </p:stCondLst>
+                      <p:childTnLst>
+                        <p:par>
+                          <p:cTn id="8" fill="hold">
+                            <p:stCondLst>
+                              <p:cond delay="0"/>
+                            </p:stCondLst>
+                            <p:childTnLst>
+                              <p:par>
+                                <p:cTn id="9" presetID="1" presetClass="entr" presetSubtype="0" fill="hold" nodeType="clickEffect">
+                                  <p:stCondLst>
+                                    <p:cond delay="0"/>
+                                  </p:stCondLst>
+                                  <p:childTnLst>
+                                    <p:set>
+                                      <p:cBhvr>
+                                        <p:cTn id="10" dur="1" fill="hold">
+                                          <p:stCondLst>
+                                            <p:cond delay="0"/>
+                                          </p:stCondLst>
+                                        </p:cTn>
+                                        <p:tgtEl>
+                                          <p:spTgt spid="271363">
+                                            <p:txEl>
+                                              <p:pRg st="1" end="1"/>
+                                            </p:txEl>
+                                          </p:spTgt>
+                                        </p:tgtEl>
+                                        <p:attrNameLst>
+                                          <p:attrName>style.visibility</p:attrName>
+                                        </p:attrNameLst>
+                                      </p:cBhvr>
+                                      <p:to>
+                                        <p:strVal val="visible"/>
+                                      </p:to>
+                                    </p:set>
+                                  </p:childTnLst>
+                                </p:cTn>
+                              </p:par>
+                            </p:childTnLst>
+                          </p:cTn>
+                        </p:par>
+                      </p:childTnLst>
+                    </p:cTn>
+                  </p:par>
+                  <p:par>
+                    <p:cTn id="11" fill="hold">
+                      <p:stCondLst>
+                        <p:cond delay="indefinite"/>
+                      </p:stCondLst>
+                      <p:childTnLst>
+                        <p:par>
+                          <p:cTn id="12" fill="hold">
+                            <p:stCondLst>
+                              <p:cond delay="0"/>
+                            </p:stCondLst>
+                            <p:childTnLst>
+                              <p:par>
+                                <p:cTn id="13" presetID="1" presetClass="entr" presetSubtype="0" fill="hold" nodeType="clickEffect">
+                                  <p:stCondLst>
+                                    <p:cond delay="0"/>
+                                  </p:stCondLst>
+                                  <p:childTnLst>
+                                    <p:set>
+                                      <p:cBhvr>
+                                        <p:cTn id="14" dur="1" fill="hold">
+                                          <p:stCondLst>
+                                            <p:cond delay="0"/>
+                                          </p:stCondLst>
+                                        </p:cTn>
+                                        <p:tgtEl>
+                                          <p:spTgt spid="271363">
+                                            <p:txEl>
+                                              <p:pRg st="2" end="2"/>
+                                            </p:txEl>
+                                          </p:spTgt>
+                                        </p:tgtEl>
+                                        <p:attrNameLst>
+                                          <p:attrName>style.visibility</p:attrName>
+                                        </p:attrNameLst>
+                                      </p:cBhvr>
+                                      <p:to>
+                                        <p:strVal val="visible"/>
+                                      </p:to>
+                                    </p:set>
+                                  </p:childTnLst>
+                                </p:cTn>
+                              </p:par>
+                            </p:childTnLst>
+                          </p:cTn>
+                        </p:par>
+                      </p:childTnLst>
+                    </p:cTn>
+                  </p:par>
+                  <p:par>
+                    <p:cTn id="15" fill="hold">
+                      <p:stCondLst>
+                        <p:cond delay="indefinite"/>
+                      </p:stCondLst>
+                      <p:childTnLst>
+                        <p:par>
+                          <p:cTn id="16" fill="hold">
+                            <p:stCondLst>
+                              <p:cond delay="0"/>
+                            </p:stCondLst>
+                            <p:childTnLst>
+                              <p:par>
+                                <p:cTn id="17" presetID="1" presetClass="entr" presetSubtype="0" fill="hold" nodeType="clickEffect">
+                                  <p:stCondLst>
+                                    <p:cond delay="0"/>
+                                  </p:stCondLst>
+                                  <p:childTnLst>
+                                    <p:set>
+                                      <p:cBhvr>
+                                        <p:cTn id="18" dur="1" fill="hold">
+                                          <p:stCondLst>
+                                            <p:cond delay="0"/>
+                                          </p:stCondLst>
+                                        </p:cTn>
+                                        <p:tgtEl>
+                                          <p:spTgt spid="271363">
+                                            <p:txEl>
+                                              <p:pRg st="3" end="3"/>
+                                            </p:txEl>
+                                          </p:spTgt>
+                                        </p:tgtEl>
+                                        <p:attrNameLst>
+                                          <p:attrName>style.visibility</p:attrName>
+                                        </p:attrNameLst>
+                                      </p:cBhvr>
+                                      <p:to>
+                                        <p:strVal val="visible"/>
+                                      </p:to>
+                                    </p:set>
+                                  </p:childTnLst>
+                                </p:cTn>
+                              </p:par>
+                              <p:par>
+                                <p:cTn id="19" presetID="1" presetClass="entr" presetSubtype="0" fill="hold" nodeType="withEffect">
+                                  <p:stCondLst>
+                                    <p:cond delay="0"/>
+                                  </p:stCondLst>
+                                  <p:childTnLst>
+                                    <p:set>
+                                      <p:cBhvr>
+                                        <p:cTn id="20" dur="1" fill="hold">
+                                          <p:stCondLst>
+                                            <p:cond delay="0"/>
+                                          </p:stCondLst>
+                                        </p:cTn>
+                                        <p:tgtEl>
+                                          <p:spTgt spid="271363">
+                                            <p:txEl>
+                                              <p:pRg st="4" end="4"/>
+                                            </p:txEl>
+                                          </p:spTgt>
+                                        </p:tgtEl>
+                                        <p:attrNameLst>
+                                          <p:attrName>style.visibility</p:attrName>
+                                        </p:attrNameLst>
+                                      </p:cBhvr>
+                                      <p:to>
+                                        <p:strVal val="visible"/>
+                                      </p:to>
+                                    </p:set>
+                                  </p:childTnLst>
+                                </p:cTn>
+                              </p:par>
+                            </p:childTnLst>
+                          </p:cTn>
+                        </p:par>
+                      </p:childTnLst>
+                    </p:cTn>
+                  </p:par>
+                  <p:par>
+                    <p:cTn id="21" fill="hold">
+                      <p:stCondLst>
+                        <p:cond delay="indefinite"/>
+                      </p:stCondLst>
+                      <p:childTnLst>
+                        <p:par>
+                          <p:cTn id="22" fill="hold">
+                            <p:stCondLst>
+                              <p:cond delay="0"/>
+                            </p:stCondLst>
+                            <p:childTnLst>
+                              <p:par>
+                                <p:cTn id="23" presetID="1" presetClass="entr" presetSubtype="0" fill="hold" nodeType="clickEffect">
+                                  <p:stCondLst>
+                                    <p:cond delay="0"/>
+                                  </p:stCondLst>
+                                  <p:childTnLst>
+                                    <p:set>
+                                      <p:cBhvr>
+                                        <p:cTn id="24" dur="1" fill="hold">
+                                          <p:stCondLst>
+                                            <p:cond delay="0"/>
+                                          </p:stCondLst>
+                                        </p:cTn>
+                                        <p:tgtEl>
+                                          <p:spTgt spid="271363">
+                                            <p:txEl>
+                                              <p:pRg st="5" end="5"/>
+                                            </p:txEl>
+                                          </p:spTgt>
+                                        </p:tgtEl>
+                                        <p:attrNameLst>
+                                          <p:attrName>style.visibility</p:attrName>
+                                        </p:attrNameLst>
+                                      </p:cBhvr>
+                                      <p:to>
+                                        <p:strVal val="visible"/>
+                                      </p:to>
+                                    </p:set>
+                                  </p:childTnLst>
+                                </p:cTn>
+                              </p:par>
+                            </p:childTnLst>
+                          </p:cTn>
+                        </p:par>
+                      </p:childTnLst>
+                    </p:cTn>
+                  </p:par>
+                </p:childTnLst>
+              </p:cTn>
+              <p:prevCondLst>
+                <p:cond evt="onPrev" delay="0">
+                  <p:tgtEl>
+                    <p:sldTgt/>
+                  </p:tgtEl>
+                </p:cond>
+              </p:prevCondLst>
+              <p:nextCondLst>
+                <p:cond evt="onNext" delay="0">
+                  <p:tgtEl>
+                    <p:sldTgt/>
+                  </p:tgtEl>
+                </p:cond>
+              </p:nextCondLst>
+            </p:seq>
+          </p:childTnLst>
+        </p:cTn>
+      </p:par>
+    </p:tnLst>
+  </p:timing>
 </p:sld>
 </file>
 
@@ -19093,6 +20386,84 @@
   <p:clrMapOvr>
     <a:masterClrMapping/>
   </p:clrMapOvr>
+  <p:timing>
+    <p:tnLst>
+      <p:par>
+        <p:cTn id="1" dur="indefinite" restart="never" nodeType="tmRoot">
+          <p:childTnLst>
+            <p:seq concurrent="1" nextAc="seek">
+              <p:cTn id="2" dur="indefinite" nodeType="mainSeq">
+                <p:childTnLst>
+                  <p:par>
+                    <p:cTn id="3" fill="hold">
+                      <p:stCondLst>
+                        <p:cond delay="indefinite"/>
+                      </p:stCondLst>
+                      <p:childTnLst>
+                        <p:par>
+                          <p:cTn id="4" fill="hold">
+                            <p:stCondLst>
+                              <p:cond delay="0"/>
+                            </p:stCondLst>
+                            <p:childTnLst>
+                              <p:par>
+                                <p:cTn id="5" presetID="1" presetClass="entr" presetSubtype="0" fill="hold" grpId="0" nodeType="clickEffect">
+                                  <p:stCondLst>
+                                    <p:cond delay="0"/>
+                                  </p:stCondLst>
+                                  <p:childTnLst>
+                                    <p:set>
+                                      <p:cBhvr>
+                                        <p:cTn id="6" dur="1" fill="hold">
+                                          <p:stCondLst>
+                                            <p:cond delay="0"/>
+                                          </p:stCondLst>
+                                        </p:cTn>
+                                        <p:tgtEl>
+                                          <p:spTgt spid="5"/>
+                                        </p:tgtEl>
+                                        <p:attrNameLst>
+                                          <p:attrName>style.visibility</p:attrName>
+                                        </p:attrNameLst>
+                                      </p:cBhvr>
+                                      <p:to>
+                                        <p:strVal val="visible"/>
+                                      </p:to>
+                                    </p:set>
+                                  </p:childTnLst>
+                                </p:cTn>
+                              </p:par>
+                            </p:childTnLst>
+                          </p:cTn>
+                        </p:par>
+                      </p:childTnLst>
+                    </p:cTn>
+                  </p:par>
+                </p:childTnLst>
+              </p:cTn>
+              <p:prevCondLst>
+                <p:cond evt="onPrev" delay="0">
+                  <p:tgtEl>
+                    <p:sldTgt/>
+                  </p:tgtEl>
+                </p:cond>
+              </p:prevCondLst>
+              <p:nextCondLst>
+                <p:cond evt="onNext" delay="0">
+                  <p:tgtEl>
+                    <p:sldTgt/>
+                  </p:tgtEl>
+                </p:cond>
+              </p:nextCondLst>
+            </p:seq>
+          </p:childTnLst>
+        </p:cTn>
+      </p:par>
+    </p:tnLst>
+    <p:bldLst>
+      <p:bldP spid="5" grpId="0" animBg="1"/>
+    </p:bldLst>
+  </p:timing>
 </p:sld>
 </file>
 
@@ -19307,6 +20678,87 @@
   <p:clrMapOvr>
     <a:masterClrMapping/>
   </p:clrMapOvr>
+  <p:timing>
+    <p:tnLst>
+      <p:par>
+        <p:cTn id="1" dur="indefinite" restart="never" nodeType="tmRoot">
+          <p:childTnLst>
+            <p:seq concurrent="1" nextAc="seek">
+              <p:cTn id="2" dur="indefinite" nodeType="mainSeq">
+                <p:childTnLst>
+                  <p:par>
+                    <p:cTn id="3" fill="hold">
+                      <p:stCondLst>
+                        <p:cond delay="indefinite"/>
+                        <p:cond evt="onBegin" delay="0">
+                          <p:tn val="2"/>
+                        </p:cond>
+                      </p:stCondLst>
+                      <p:childTnLst>
+                        <p:par>
+                          <p:cTn id="4" fill="hold">
+                            <p:stCondLst>
+                              <p:cond delay="0"/>
+                            </p:stCondLst>
+                            <p:childTnLst>
+                              <p:par>
+                                <p:cTn id="5" presetID="1" presetClass="entr" presetSubtype="0" fill="hold" grpId="0" nodeType="withEffect">
+                                  <p:stCondLst>
+                                    <p:cond delay="1500"/>
+                                  </p:stCondLst>
+                                  <p:childTnLst>
+                                    <p:set>
+                                      <p:cBhvr>
+                                        <p:cTn id="6" dur="1" fill="hold">
+                                          <p:stCondLst>
+                                            <p:cond delay="0"/>
+                                          </p:stCondLst>
+                                        </p:cTn>
+                                        <p:tgtEl>
+                                          <p:spTgt spid="5"/>
+                                        </p:tgtEl>
+                                        <p:attrNameLst>
+                                          <p:attrName>style.visibility</p:attrName>
+                                        </p:attrNameLst>
+                                      </p:cBhvr>
+                                      <p:to>
+                                        <p:strVal val="visible"/>
+                                      </p:to>
+                                    </p:set>
+                                  </p:childTnLst>
+                                </p:cTn>
+                              </p:par>
+                            </p:childTnLst>
+                          </p:cTn>
+                        </p:par>
+                      </p:childTnLst>
+                    </p:cTn>
+                  </p:par>
+                </p:childTnLst>
+              </p:cTn>
+              <p:prevCondLst>
+                <p:cond evt="onPrev" delay="0">
+                  <p:tgtEl>
+                    <p:sldTgt/>
+                  </p:tgtEl>
+                </p:cond>
+              </p:prevCondLst>
+              <p:nextCondLst>
+                <p:cond evt="onNext" delay="0">
+                  <p:tgtEl>
+                    <p:sldTgt/>
+                  </p:tgtEl>
+                </p:cond>
+              </p:nextCondLst>
+            </p:seq>
+          </p:childTnLst>
+        </p:cTn>
+      </p:par>
+    </p:tnLst>
+    <p:bldLst>
+      <p:bldP spid="5" grpId="0" animBg="1"/>
+    </p:bldLst>
+  </p:timing>
 </p:sld>
 </file>
 
@@ -19521,6 +20973,87 @@
   <p:clrMapOvr>
     <a:masterClrMapping/>
   </p:clrMapOvr>
+  <p:timing>
+    <p:tnLst>
+      <p:par>
+        <p:cTn id="1" dur="indefinite" restart="never" nodeType="tmRoot">
+          <p:childTnLst>
+            <p:seq concurrent="1" nextAc="seek">
+              <p:cTn id="2" dur="indefinite" nodeType="mainSeq">
+                <p:childTnLst>
+                  <p:par>
+                    <p:cTn id="3" fill="hold">
+                      <p:stCondLst>
+                        <p:cond delay="indefinite"/>
+                        <p:cond evt="onBegin" delay="0">
+                          <p:tn val="2"/>
+                        </p:cond>
+                      </p:stCondLst>
+                      <p:childTnLst>
+                        <p:par>
+                          <p:cTn id="4" fill="hold">
+                            <p:stCondLst>
+                              <p:cond delay="0"/>
+                            </p:stCondLst>
+                            <p:childTnLst>
+                              <p:par>
+                                <p:cTn id="5" presetID="1" presetClass="entr" presetSubtype="0" fill="hold" grpId="0" nodeType="afterEffect">
+                                  <p:stCondLst>
+                                    <p:cond delay="2000"/>
+                                  </p:stCondLst>
+                                  <p:childTnLst>
+                                    <p:set>
+                                      <p:cBhvr>
+                                        <p:cTn id="6" dur="1" fill="hold">
+                                          <p:stCondLst>
+                                            <p:cond delay="0"/>
+                                          </p:stCondLst>
+                                        </p:cTn>
+                                        <p:tgtEl>
+                                          <p:spTgt spid="5"/>
+                                        </p:tgtEl>
+                                        <p:attrNameLst>
+                                          <p:attrName>style.visibility</p:attrName>
+                                        </p:attrNameLst>
+                                      </p:cBhvr>
+                                      <p:to>
+                                        <p:strVal val="visible"/>
+                                      </p:to>
+                                    </p:set>
+                                  </p:childTnLst>
+                                </p:cTn>
+                              </p:par>
+                            </p:childTnLst>
+                          </p:cTn>
+                        </p:par>
+                      </p:childTnLst>
+                    </p:cTn>
+                  </p:par>
+                </p:childTnLst>
+              </p:cTn>
+              <p:prevCondLst>
+                <p:cond evt="onPrev" delay="0">
+                  <p:tgtEl>
+                    <p:sldTgt/>
+                  </p:tgtEl>
+                </p:cond>
+              </p:prevCondLst>
+              <p:nextCondLst>
+                <p:cond evt="onNext" delay="0">
+                  <p:tgtEl>
+                    <p:sldTgt/>
+                  </p:tgtEl>
+                </p:cond>
+              </p:nextCondLst>
+            </p:seq>
+          </p:childTnLst>
+        </p:cTn>
+      </p:par>
+    </p:tnLst>
+    <p:bldLst>
+      <p:bldP spid="5" grpId="0" animBg="1"/>
+    </p:bldLst>
+  </p:timing>
 </p:sld>
 </file>
 
@@ -19761,6 +21294,232 @@
   <p:clrMapOvr>
     <a:masterClrMapping/>
   </p:clrMapOvr>
+  <p:timing>
+    <p:tnLst>
+      <p:par>
+        <p:cTn id="1" dur="indefinite" restart="never" nodeType="tmRoot">
+          <p:childTnLst>
+            <p:seq concurrent="1" nextAc="seek">
+              <p:cTn id="2" dur="indefinite" nodeType="mainSeq">
+                <p:childTnLst>
+                  <p:par>
+                    <p:cTn id="3" fill="hold">
+                      <p:stCondLst>
+                        <p:cond delay="indefinite"/>
+                      </p:stCondLst>
+                      <p:childTnLst>
+                        <p:par>
+                          <p:cTn id="4" fill="hold">
+                            <p:stCondLst>
+                              <p:cond delay="0"/>
+                            </p:stCondLst>
+                            <p:childTnLst>
+                              <p:par>
+                                <p:cTn id="5" presetID="1" presetClass="entr" presetSubtype="0" fill="hold" nodeType="clickEffect">
+                                  <p:stCondLst>
+                                    <p:cond delay="0"/>
+                                  </p:stCondLst>
+                                  <p:childTnLst>
+                                    <p:set>
+                                      <p:cBhvr>
+                                        <p:cTn id="6" dur="1" fill="hold">
+                                          <p:stCondLst>
+                                            <p:cond delay="0"/>
+                                          </p:stCondLst>
+                                        </p:cTn>
+                                        <p:tgtEl>
+                                          <p:spTgt spid="197636">
+                                            <p:txEl>
+                                              <p:pRg st="1" end="1"/>
+                                            </p:txEl>
+                                          </p:spTgt>
+                                        </p:tgtEl>
+                                        <p:attrNameLst>
+                                          <p:attrName>style.visibility</p:attrName>
+                                        </p:attrNameLst>
+                                      </p:cBhvr>
+                                      <p:to>
+                                        <p:strVal val="visible"/>
+                                      </p:to>
+                                    </p:set>
+                                  </p:childTnLst>
+                                </p:cTn>
+                              </p:par>
+                            </p:childTnLst>
+                          </p:cTn>
+                        </p:par>
+                      </p:childTnLst>
+                    </p:cTn>
+                  </p:par>
+                  <p:par>
+                    <p:cTn id="7" fill="hold">
+                      <p:stCondLst>
+                        <p:cond delay="indefinite"/>
+                      </p:stCondLst>
+                      <p:childTnLst>
+                        <p:par>
+                          <p:cTn id="8" fill="hold">
+                            <p:stCondLst>
+                              <p:cond delay="0"/>
+                            </p:stCondLst>
+                            <p:childTnLst>
+                              <p:par>
+                                <p:cTn id="9" presetID="1" presetClass="entr" presetSubtype="0" fill="hold" nodeType="clickEffect">
+                                  <p:stCondLst>
+                                    <p:cond delay="0"/>
+                                  </p:stCondLst>
+                                  <p:childTnLst>
+                                    <p:set>
+                                      <p:cBhvr>
+                                        <p:cTn id="10" dur="1" fill="hold">
+                                          <p:stCondLst>
+                                            <p:cond delay="0"/>
+                                          </p:stCondLst>
+                                        </p:cTn>
+                                        <p:tgtEl>
+                                          <p:spTgt spid="197636">
+                                            <p:txEl>
+                                              <p:pRg st="1" end="1"/>
+                                            </p:txEl>
+                                          </p:spTgt>
+                                        </p:tgtEl>
+                                        <p:attrNameLst>
+                                          <p:attrName>style.visibility</p:attrName>
+                                        </p:attrNameLst>
+                                      </p:cBhvr>
+                                      <p:to>
+                                        <p:strVal val="visible"/>
+                                      </p:to>
+                                    </p:set>
+                                  </p:childTnLst>
+                                </p:cTn>
+                              </p:par>
+                            </p:childTnLst>
+                          </p:cTn>
+                        </p:par>
+                      </p:childTnLst>
+                    </p:cTn>
+                  </p:par>
+                  <p:par>
+                    <p:cTn id="11" fill="hold">
+                      <p:stCondLst>
+                        <p:cond delay="indefinite"/>
+                      </p:stCondLst>
+                      <p:childTnLst>
+                        <p:par>
+                          <p:cTn id="12" fill="hold">
+                            <p:stCondLst>
+                              <p:cond delay="0"/>
+                            </p:stCondLst>
+                            <p:childTnLst>
+                              <p:par>
+                                <p:cTn id="13" presetID="1" presetClass="entr" presetSubtype="0" fill="hold" nodeType="clickEffect">
+                                  <p:stCondLst>
+                                    <p:cond delay="0"/>
+                                  </p:stCondLst>
+                                  <p:childTnLst>
+                                    <p:set>
+                                      <p:cBhvr>
+                                        <p:cTn id="14" dur="1" fill="hold">
+                                          <p:stCondLst>
+                                            <p:cond delay="0"/>
+                                          </p:stCondLst>
+                                        </p:cTn>
+                                        <p:tgtEl>
+                                          <p:spTgt spid="197636">
+                                            <p:txEl>
+                                              <p:pRg st="3" end="3"/>
+                                            </p:txEl>
+                                          </p:spTgt>
+                                        </p:tgtEl>
+                                        <p:attrNameLst>
+                                          <p:attrName>style.visibility</p:attrName>
+                                        </p:attrNameLst>
+                                      </p:cBhvr>
+                                      <p:to>
+                                        <p:strVal val="visible"/>
+                                      </p:to>
+                                    </p:set>
+                                  </p:childTnLst>
+                                </p:cTn>
+                              </p:par>
+                            </p:childTnLst>
+                          </p:cTn>
+                        </p:par>
+                      </p:childTnLst>
+                    </p:cTn>
+                  </p:par>
+                  <p:par>
+                    <p:cTn id="15" fill="hold">
+                      <p:stCondLst>
+                        <p:cond delay="indefinite"/>
+                      </p:stCondLst>
+                      <p:childTnLst>
+                        <p:par>
+                          <p:cTn id="16" fill="hold">
+                            <p:stCondLst>
+                              <p:cond delay="0"/>
+                            </p:stCondLst>
+                            <p:childTnLst>
+                              <p:par>
+                                <p:cTn id="17" presetID="1" presetClass="entr" presetSubtype="0" fill="hold" nodeType="clickEffect">
+                                  <p:stCondLst>
+                                    <p:cond delay="0"/>
+                                  </p:stCondLst>
+                                  <p:childTnLst>
+                                    <p:set>
+                                      <p:cBhvr>
+                                        <p:cTn id="18" dur="1" fill="hold">
+                                          <p:stCondLst>
+                                            <p:cond delay="0"/>
+                                          </p:stCondLst>
+                                        </p:cTn>
+                                        <p:tgtEl>
+                                          <p:spTgt spid="197636">
+                                            <p:txEl>
+                                              <p:pRg st="4" end="4"/>
+                                            </p:txEl>
+                                          </p:spTgt>
+                                        </p:tgtEl>
+                                        <p:attrNameLst>
+                                          <p:attrName>style.visibility</p:attrName>
+                                        </p:attrNameLst>
+                                      </p:cBhvr>
+                                      <p:to>
+                                        <p:strVal val="visible"/>
+                                      </p:to>
+                                    </p:set>
+                                  </p:childTnLst>
+                                </p:cTn>
+                              </p:par>
+                            </p:childTnLst>
+                          </p:cTn>
+                        </p:par>
+                      </p:childTnLst>
+                    </p:cTn>
+                  </p:par>
+                </p:childTnLst>
+              </p:cTn>
+              <p:prevCondLst>
+                <p:cond evt="onPrev" delay="0">
+                  <p:tgtEl>
+                    <p:sldTgt/>
+                  </p:tgtEl>
+                </p:cond>
+              </p:prevCondLst>
+              <p:nextCondLst>
+                <p:cond evt="onNext" delay="0">
+                  <p:tgtEl>
+                    <p:sldTgt/>
+                  </p:tgtEl>
+                </p:cond>
+              </p:nextCondLst>
+            </p:seq>
+          </p:childTnLst>
+        </p:cTn>
+      </p:par>
+    </p:tnLst>
+  </p:timing>
 </p:sld>
 </file>
 
@@ -19835,7 +21594,7 @@
             </a:pPr>
             <a:r>
               <a:rPr lang="en-US" altLang="en-US" sz="2800" dirty="0"/>
-              <a:t>With a type parameter the degree of polymorphism: </a:t>
+              <a:t>With a type parameter the degree of polymorphism: 	</a:t>
             </a:r>
             <a:r>
               <a:rPr lang="en-US" altLang="en-US" sz="2800" b="1" dirty="0" err="1">
@@ -19851,32 +21610,23 @@
               </a:rPr>
               <a:t>&lt;Post&gt; </a:t>
             </a:r>
-            <a:r>
-              <a:rPr lang="en-US" altLang="en-US" sz="2800" dirty="0"/>
-              <a:t>is </a:t>
-            </a:r>
-            <a:r>
-              <a:rPr lang="en-US" altLang="en-US" sz="2800" b="1" dirty="0"/>
-              <a:t>limited</a:t>
-            </a:r>
-            <a:r>
-              <a:rPr lang="en-US" altLang="en-US" sz="2800" dirty="0"/>
-              <a:t>.</a:t>
-            </a:r>
-            <a:endParaRPr lang="en-US" altLang="en-US" sz="2800" b="1" dirty="0">
-              <a:latin typeface="Courier New" pitchFamily="49" charset="0"/>
-              <a:cs typeface="Courier New" pitchFamily="49" charset="0"/>
-            </a:endParaRPr>
-          </a:p>
-          <a:p>
-            <a:pPr lvl="1">
+          </a:p>
+          <a:p>
+            <a:pPr marL="400050" lvl="1" indent="0">
+              <a:buNone/>
               <a:defRPr/>
             </a:pPr>
             <a:r>
-              <a:rPr lang="en-US" altLang="en-US" sz="2400" dirty="0">
-                <a:cs typeface="Courier New" pitchFamily="49" charset="0"/>
-              </a:rPr>
-              <a:t>Collection methods are then typed.</a:t>
+              <a:rPr lang="en-US" altLang="en-US" dirty="0"/>
+              <a:t>is </a:t>
+            </a:r>
+            <a:r>
+              <a:rPr lang="en-US" altLang="en-US" b="1" dirty="0"/>
+              <a:t>limited</a:t>
+            </a:r>
+            <a:r>
+              <a:rPr lang="en-US" altLang="en-US" dirty="0"/>
+              <a:t>.</a:t>
             </a:r>
             <a:br>
               <a:rPr lang="en-US" altLang="en-US" sz="2400" dirty="0">
@@ -19895,8 +21645,14 @@
               <a:rPr lang="en-US" altLang="en-US" sz="2800" dirty="0"/>
               <a:t>Without a type parameter, </a:t>
             </a:r>
+          </a:p>
+          <a:p>
+            <a:pPr marL="800100" lvl="2" indent="0">
+              <a:buNone/>
+              <a:defRPr/>
+            </a:pPr>
             <a:br>
-              <a:rPr lang="en-US" altLang="en-US" sz="2800" dirty="0"/>
+              <a:rPr lang="en-US" altLang="en-US" sz="1600" dirty="0"/>
             </a:br>
             <a:r>
               <a:rPr lang="en-US" altLang="en-US" sz="2800" b="1" dirty="0" err="1">
@@ -19911,6 +21667,19 @@
                 <a:cs typeface="Courier New" pitchFamily="49" charset="0"/>
               </a:rPr>
               <a:t>&lt;Object&gt; </a:t>
+            </a:r>
+          </a:p>
+          <a:p>
+            <a:pPr marL="0" indent="0">
+              <a:buNone/>
+              <a:defRPr/>
+            </a:pPr>
+            <a:r>
+              <a:rPr lang="en-US" altLang="en-US" sz="2800" b="1" dirty="0">
+                <a:latin typeface="Courier New" pitchFamily="49" charset="0"/>
+                <a:cs typeface="Courier New" pitchFamily="49" charset="0"/>
+              </a:rPr>
+              <a:t> </a:t>
             </a:r>
             <a:r>
               <a:rPr lang="en-US" altLang="en-US" sz="2800" dirty="0"/>
@@ -19992,6 +21761,325 @@
   <p:clrMapOvr>
     <a:masterClrMapping/>
   </p:clrMapOvr>
+  <p:timing>
+    <p:tnLst>
+      <p:par>
+        <p:cTn id="1" dur="indefinite" restart="never" nodeType="tmRoot">
+          <p:childTnLst>
+            <p:seq concurrent="1" nextAc="seek">
+              <p:cTn id="2" dur="indefinite" nodeType="mainSeq">
+                <p:childTnLst>
+                  <p:par>
+                    <p:cTn id="3" fill="hold">
+                      <p:stCondLst>
+                        <p:cond delay="indefinite"/>
+                      </p:stCondLst>
+                      <p:childTnLst>
+                        <p:par>
+                          <p:cTn id="4" fill="hold">
+                            <p:stCondLst>
+                              <p:cond delay="0"/>
+                            </p:stCondLst>
+                            <p:childTnLst>
+                              <p:par>
+                                <p:cTn id="5" presetID="1" presetClass="entr" presetSubtype="0" fill="hold" nodeType="clickEffect">
+                                  <p:stCondLst>
+                                    <p:cond delay="0"/>
+                                  </p:stCondLst>
+                                  <p:childTnLst>
+                                    <p:set>
+                                      <p:cBhvr>
+                                        <p:cTn id="6" dur="1" fill="hold">
+                                          <p:stCondLst>
+                                            <p:cond delay="0"/>
+                                          </p:stCondLst>
+                                        </p:cTn>
+                                        <p:tgtEl>
+                                          <p:spTgt spid="3">
+                                            <p:txEl>
+                                              <p:pRg st="0" end="0"/>
+                                            </p:txEl>
+                                          </p:spTgt>
+                                        </p:tgtEl>
+                                        <p:attrNameLst>
+                                          <p:attrName>style.visibility</p:attrName>
+                                        </p:attrNameLst>
+                                      </p:cBhvr>
+                                      <p:to>
+                                        <p:strVal val="visible"/>
+                                      </p:to>
+                                    </p:set>
+                                  </p:childTnLst>
+                                </p:cTn>
+                              </p:par>
+                              <p:par>
+                                <p:cTn id="7" presetID="1" presetClass="entr" presetSubtype="0" fill="hold" nodeType="withEffect">
+                                  <p:stCondLst>
+                                    <p:cond delay="0"/>
+                                  </p:stCondLst>
+                                  <p:childTnLst>
+                                    <p:set>
+                                      <p:cBhvr>
+                                        <p:cTn id="8" dur="1" fill="hold">
+                                          <p:stCondLst>
+                                            <p:cond delay="0"/>
+                                          </p:stCondLst>
+                                        </p:cTn>
+                                        <p:tgtEl>
+                                          <p:spTgt spid="3">
+                                            <p:txEl>
+                                              <p:pRg st="1" end="1"/>
+                                            </p:txEl>
+                                          </p:spTgt>
+                                        </p:tgtEl>
+                                        <p:attrNameLst>
+                                          <p:attrName>style.visibility</p:attrName>
+                                        </p:attrNameLst>
+                                      </p:cBhvr>
+                                      <p:to>
+                                        <p:strVal val="visible"/>
+                                      </p:to>
+                                    </p:set>
+                                  </p:childTnLst>
+                                </p:cTn>
+                              </p:par>
+                            </p:childTnLst>
+                          </p:cTn>
+                        </p:par>
+                      </p:childTnLst>
+                    </p:cTn>
+                  </p:par>
+                  <p:par>
+                    <p:cTn id="9" fill="hold">
+                      <p:stCondLst>
+                        <p:cond delay="indefinite"/>
+                      </p:stCondLst>
+                      <p:childTnLst>
+                        <p:par>
+                          <p:cTn id="10" fill="hold">
+                            <p:stCondLst>
+                              <p:cond delay="0"/>
+                            </p:stCondLst>
+                            <p:childTnLst>
+                              <p:par>
+                                <p:cTn id="11" presetID="1" presetClass="entr" presetSubtype="0" fill="hold" nodeType="clickEffect">
+                                  <p:stCondLst>
+                                    <p:cond delay="0"/>
+                                  </p:stCondLst>
+                                  <p:childTnLst>
+                                    <p:set>
+                                      <p:cBhvr>
+                                        <p:cTn id="12" dur="1" fill="hold">
+                                          <p:stCondLst>
+                                            <p:cond delay="0"/>
+                                          </p:stCondLst>
+                                        </p:cTn>
+                                        <p:tgtEl>
+                                          <p:spTgt spid="3">
+                                            <p:txEl>
+                                              <p:pRg st="2" end="2"/>
+                                            </p:txEl>
+                                          </p:spTgt>
+                                        </p:tgtEl>
+                                        <p:attrNameLst>
+                                          <p:attrName>style.visibility</p:attrName>
+                                        </p:attrNameLst>
+                                      </p:cBhvr>
+                                      <p:to>
+                                        <p:strVal val="visible"/>
+                                      </p:to>
+                                    </p:set>
+                                  </p:childTnLst>
+                                </p:cTn>
+                              </p:par>
+                              <p:par>
+                                <p:cTn id="13" presetID="1" presetClass="entr" presetSubtype="0" fill="hold" nodeType="withEffect">
+                                  <p:stCondLst>
+                                    <p:cond delay="0"/>
+                                  </p:stCondLst>
+                                  <p:childTnLst>
+                                    <p:set>
+                                      <p:cBhvr>
+                                        <p:cTn id="14" dur="1" fill="hold">
+                                          <p:stCondLst>
+                                            <p:cond delay="0"/>
+                                          </p:stCondLst>
+                                        </p:cTn>
+                                        <p:tgtEl>
+                                          <p:spTgt spid="3">
+                                            <p:txEl>
+                                              <p:pRg st="3" end="3"/>
+                                            </p:txEl>
+                                          </p:spTgt>
+                                        </p:tgtEl>
+                                        <p:attrNameLst>
+                                          <p:attrName>style.visibility</p:attrName>
+                                        </p:attrNameLst>
+                                      </p:cBhvr>
+                                      <p:to>
+                                        <p:strVal val="visible"/>
+                                      </p:to>
+                                    </p:set>
+                                  </p:childTnLst>
+                                </p:cTn>
+                              </p:par>
+                              <p:par>
+                                <p:cTn id="15" presetID="1" presetClass="entr" presetSubtype="0" fill="hold" nodeType="withEffect">
+                                  <p:stCondLst>
+                                    <p:cond delay="0"/>
+                                  </p:stCondLst>
+                                  <p:childTnLst>
+                                    <p:set>
+                                      <p:cBhvr>
+                                        <p:cTn id="16" dur="1" fill="hold">
+                                          <p:stCondLst>
+                                            <p:cond delay="0"/>
+                                          </p:stCondLst>
+                                        </p:cTn>
+                                        <p:tgtEl>
+                                          <p:spTgt spid="3">
+                                            <p:txEl>
+                                              <p:pRg st="4" end="4"/>
+                                            </p:txEl>
+                                          </p:spTgt>
+                                        </p:tgtEl>
+                                        <p:attrNameLst>
+                                          <p:attrName>style.visibility</p:attrName>
+                                        </p:attrNameLst>
+                                      </p:cBhvr>
+                                      <p:to>
+                                        <p:strVal val="visible"/>
+                                      </p:to>
+                                    </p:set>
+                                  </p:childTnLst>
+                                </p:cTn>
+                              </p:par>
+                            </p:childTnLst>
+                          </p:cTn>
+                        </p:par>
+                      </p:childTnLst>
+                    </p:cTn>
+                  </p:par>
+                  <p:par>
+                    <p:cTn id="17" fill="hold">
+                      <p:stCondLst>
+                        <p:cond delay="indefinite"/>
+                      </p:stCondLst>
+                      <p:childTnLst>
+                        <p:par>
+                          <p:cTn id="18" fill="hold">
+                            <p:stCondLst>
+                              <p:cond delay="0"/>
+                            </p:stCondLst>
+                            <p:childTnLst>
+                              <p:par>
+                                <p:cTn id="19" presetID="1" presetClass="entr" presetSubtype="0" fill="hold" nodeType="clickEffect">
+                                  <p:stCondLst>
+                                    <p:cond delay="0"/>
+                                  </p:stCondLst>
+                                  <p:childTnLst>
+                                    <p:set>
+                                      <p:cBhvr>
+                                        <p:cTn id="20" dur="1" fill="hold">
+                                          <p:stCondLst>
+                                            <p:cond delay="0"/>
+                                          </p:stCondLst>
+                                        </p:cTn>
+                                        <p:tgtEl>
+                                          <p:spTgt spid="3">
+                                            <p:txEl>
+                                              <p:pRg st="5" end="5"/>
+                                            </p:txEl>
+                                          </p:spTgt>
+                                        </p:tgtEl>
+                                        <p:attrNameLst>
+                                          <p:attrName>style.visibility</p:attrName>
+                                        </p:attrNameLst>
+                                      </p:cBhvr>
+                                      <p:to>
+                                        <p:strVal val="visible"/>
+                                      </p:to>
+                                    </p:set>
+                                  </p:childTnLst>
+                                </p:cTn>
+                              </p:par>
+                            </p:childTnLst>
+                          </p:cTn>
+                        </p:par>
+                      </p:childTnLst>
+                    </p:cTn>
+                  </p:par>
+                  <p:par>
+                    <p:cTn id="21" fill="hold">
+                      <p:stCondLst>
+                        <p:cond delay="indefinite"/>
+                      </p:stCondLst>
+                      <p:childTnLst>
+                        <p:par>
+                          <p:cTn id="22" fill="hold">
+                            <p:stCondLst>
+                              <p:cond delay="0"/>
+                            </p:stCondLst>
+                            <p:childTnLst>
+                              <p:par>
+                                <p:cTn id="23" presetID="1" presetClass="entr" presetSubtype="0" fill="hold" nodeType="clickEffect">
+                                  <p:stCondLst>
+                                    <p:cond delay="0"/>
+                                  </p:stCondLst>
+                                  <p:childTnLst>
+                                    <p:set>
+                                      <p:cBhvr>
+                                        <p:cTn id="24" dur="1" fill="hold">
+                                          <p:stCondLst>
+                                            <p:cond delay="0"/>
+                                          </p:stCondLst>
+                                        </p:cTn>
+                                        <p:tgtEl>
+                                          <p:spTgt spid="3">
+                                            <p:txEl>
+                                              <p:pRg st="6" end="6"/>
+                                            </p:txEl>
+                                          </p:spTgt>
+                                        </p:tgtEl>
+                                        <p:attrNameLst>
+                                          <p:attrName>style.visibility</p:attrName>
+                                        </p:attrNameLst>
+                                      </p:cBhvr>
+                                      <p:to>
+                                        <p:strVal val="visible"/>
+                                      </p:to>
+                                    </p:set>
+                                  </p:childTnLst>
+                                </p:cTn>
+                              </p:par>
+                            </p:childTnLst>
+                          </p:cTn>
+                        </p:par>
+                      </p:childTnLst>
+                    </p:cTn>
+                  </p:par>
+                </p:childTnLst>
+              </p:cTn>
+              <p:prevCondLst>
+                <p:cond evt="onPrev" delay="0">
+                  <p:tgtEl>
+                    <p:sldTgt/>
+                  </p:tgtEl>
+                </p:cond>
+              </p:prevCondLst>
+              <p:nextCondLst>
+                <p:cond evt="onNext" delay="0">
+                  <p:tgtEl>
+                    <p:sldTgt/>
+                  </p:tgtEl>
+                </p:cond>
+              </p:nextCondLst>
+            </p:seq>
+          </p:childTnLst>
+        </p:cTn>
+      </p:par>
+    </p:tnLst>
+  </p:timing>
 </p:sld>
 </file>
 
@@ -20184,6 +22272,196 @@
   <p:clrMapOvr>
     <a:masterClrMapping/>
   </p:clrMapOvr>
+  <p:timing>
+    <p:tnLst>
+      <p:par>
+        <p:cTn id="1" dur="indefinite" restart="never" nodeType="tmRoot">
+          <p:childTnLst>
+            <p:seq concurrent="1" nextAc="seek">
+              <p:cTn id="2" dur="indefinite" nodeType="mainSeq">
+                <p:childTnLst>
+                  <p:par>
+                    <p:cTn id="3" fill="hold">
+                      <p:stCondLst>
+                        <p:cond delay="indefinite"/>
+                      </p:stCondLst>
+                      <p:childTnLst>
+                        <p:par>
+                          <p:cTn id="4" fill="hold">
+                            <p:stCondLst>
+                              <p:cond delay="0"/>
+                            </p:stCondLst>
+                            <p:childTnLst>
+                              <p:par>
+                                <p:cTn id="5" presetID="1" presetClass="entr" presetSubtype="0" fill="hold" nodeType="clickEffect">
+                                  <p:stCondLst>
+                                    <p:cond delay="0"/>
+                                  </p:stCondLst>
+                                  <p:childTnLst>
+                                    <p:set>
+                                      <p:cBhvr>
+                                        <p:cTn id="6" dur="1" fill="hold">
+                                          <p:stCondLst>
+                                            <p:cond delay="0"/>
+                                          </p:stCondLst>
+                                        </p:cTn>
+                                        <p:tgtEl>
+                                          <p:spTgt spid="199684">
+                                            <p:txEl>
+                                              <p:pRg st="0" end="0"/>
+                                            </p:txEl>
+                                          </p:spTgt>
+                                        </p:tgtEl>
+                                        <p:attrNameLst>
+                                          <p:attrName>style.visibility</p:attrName>
+                                        </p:attrNameLst>
+                                      </p:cBhvr>
+                                      <p:to>
+                                        <p:strVal val="visible"/>
+                                      </p:to>
+                                    </p:set>
+                                  </p:childTnLst>
+                                </p:cTn>
+                              </p:par>
+                              <p:par>
+                                <p:cTn id="7" presetID="1" presetClass="entr" presetSubtype="0" fill="hold" nodeType="withEffect">
+                                  <p:stCondLst>
+                                    <p:cond delay="0"/>
+                                  </p:stCondLst>
+                                  <p:childTnLst>
+                                    <p:set>
+                                      <p:cBhvr>
+                                        <p:cTn id="8" dur="1" fill="hold">
+                                          <p:stCondLst>
+                                            <p:cond delay="0"/>
+                                          </p:stCondLst>
+                                        </p:cTn>
+                                        <p:tgtEl>
+                                          <p:spTgt spid="199684">
+                                            <p:txEl>
+                                              <p:pRg st="1" end="1"/>
+                                            </p:txEl>
+                                          </p:spTgt>
+                                        </p:tgtEl>
+                                        <p:attrNameLst>
+                                          <p:attrName>style.visibility</p:attrName>
+                                        </p:attrNameLst>
+                                      </p:cBhvr>
+                                      <p:to>
+                                        <p:strVal val="visible"/>
+                                      </p:to>
+                                    </p:set>
+                                  </p:childTnLst>
+                                </p:cTn>
+                              </p:par>
+                              <p:par>
+                                <p:cTn id="9" presetID="1" presetClass="entr" presetSubtype="0" fill="hold" nodeType="withEffect">
+                                  <p:stCondLst>
+                                    <p:cond delay="0"/>
+                                  </p:stCondLst>
+                                  <p:childTnLst>
+                                    <p:set>
+                                      <p:cBhvr>
+                                        <p:cTn id="10" dur="1" fill="hold">
+                                          <p:stCondLst>
+                                            <p:cond delay="0"/>
+                                          </p:stCondLst>
+                                        </p:cTn>
+                                        <p:tgtEl>
+                                          <p:spTgt spid="199684">
+                                            <p:txEl>
+                                              <p:pRg st="2" end="2"/>
+                                            </p:txEl>
+                                          </p:spTgt>
+                                        </p:tgtEl>
+                                        <p:attrNameLst>
+                                          <p:attrName>style.visibility</p:attrName>
+                                        </p:attrNameLst>
+                                      </p:cBhvr>
+                                      <p:to>
+                                        <p:strVal val="visible"/>
+                                      </p:to>
+                                    </p:set>
+                                  </p:childTnLst>
+                                </p:cTn>
+                              </p:par>
+                            </p:childTnLst>
+                          </p:cTn>
+                        </p:par>
+                      </p:childTnLst>
+                    </p:cTn>
+                  </p:par>
+                  <p:par>
+                    <p:cTn id="11" fill="hold">
+                      <p:stCondLst>
+                        <p:cond delay="indefinite"/>
+                      </p:stCondLst>
+                      <p:childTnLst>
+                        <p:par>
+                          <p:cTn id="12" fill="hold">
+                            <p:stCondLst>
+                              <p:cond delay="0"/>
+                            </p:stCondLst>
+                            <p:childTnLst>
+                              <p:par>
+                                <p:cTn id="13" presetID="1" presetClass="entr" presetSubtype="0" fill="hold" nodeType="clickEffect">
+                                  <p:stCondLst>
+                                    <p:cond delay="0"/>
+                                  </p:stCondLst>
+                                  <p:childTnLst>
+                                    <p:set>
+                                      <p:cBhvr>
+                                        <p:cTn id="14" dur="1" fill="hold">
+                                          <p:stCondLst>
+                                            <p:cond delay="0"/>
+                                          </p:stCondLst>
+                                        </p:cTn>
+                                        <p:tgtEl>
+                                          <p:spTgt spid="199684">
+                                            <p:txEl>
+                                              <p:pRg st="4" end="4"/>
+                                            </p:txEl>
+                                          </p:spTgt>
+                                        </p:tgtEl>
+                                        <p:attrNameLst>
+                                          <p:attrName>style.visibility</p:attrName>
+                                        </p:attrNameLst>
+                                      </p:cBhvr>
+                                      <p:to>
+                                        <p:strVal val="visible"/>
+                                      </p:to>
+                                    </p:set>
+                                  </p:childTnLst>
+                                </p:cTn>
+                              </p:par>
+                            </p:childTnLst>
+                          </p:cTn>
+                        </p:par>
+                      </p:childTnLst>
+                    </p:cTn>
+                  </p:par>
+                </p:childTnLst>
+              </p:cTn>
+              <p:prevCondLst>
+                <p:cond evt="onPrev" delay="0">
+                  <p:tgtEl>
+                    <p:sldTgt/>
+                  </p:tgtEl>
+                </p:cond>
+              </p:prevCondLst>
+              <p:nextCondLst>
+                <p:cond evt="onNext" delay="0">
+                  <p:tgtEl>
+                    <p:sldTgt/>
+                  </p:tgtEl>
+                </p:cond>
+              </p:nextCondLst>
+            </p:seq>
+          </p:childTnLst>
+        </p:cTn>
+      </p:par>
+    </p:tnLst>
+  </p:timing>
 </p:sld>
 </file>
 
@@ -20609,6 +22887,310 @@
   <p:clrMapOvr>
     <a:masterClrMapping/>
   </p:clrMapOvr>
+  <p:timing>
+    <p:tnLst>
+      <p:par>
+        <p:cTn id="1" dur="indefinite" restart="never" nodeType="tmRoot">
+          <p:childTnLst>
+            <p:seq concurrent="1" nextAc="seek">
+              <p:cTn id="2" dur="indefinite" nodeType="mainSeq">
+                <p:childTnLst>
+                  <p:par>
+                    <p:cTn id="3" fill="hold">
+                      <p:stCondLst>
+                        <p:cond delay="indefinite"/>
+                      </p:stCondLst>
+                      <p:childTnLst>
+                        <p:par>
+                          <p:cTn id="4" fill="hold">
+                            <p:stCondLst>
+                              <p:cond delay="0"/>
+                            </p:stCondLst>
+                            <p:childTnLst>
+                              <p:par>
+                                <p:cTn id="5" presetID="1" presetClass="entr" presetSubtype="0" fill="hold" nodeType="clickEffect">
+                                  <p:stCondLst>
+                                    <p:cond delay="0"/>
+                                  </p:stCondLst>
+                                  <p:childTnLst>
+                                    <p:set>
+                                      <p:cBhvr>
+                                        <p:cTn id="6" dur="1" fill="hold">
+                                          <p:stCondLst>
+                                            <p:cond delay="0"/>
+                                          </p:stCondLst>
+                                        </p:cTn>
+                                        <p:tgtEl>
+                                          <p:spTgt spid="245763">
+                                            <p:txEl>
+                                              <p:pRg st="0" end="0"/>
+                                            </p:txEl>
+                                          </p:spTgt>
+                                        </p:tgtEl>
+                                        <p:attrNameLst>
+                                          <p:attrName>style.visibility</p:attrName>
+                                        </p:attrNameLst>
+                                      </p:cBhvr>
+                                      <p:to>
+                                        <p:strVal val="visible"/>
+                                      </p:to>
+                                    </p:set>
+                                  </p:childTnLst>
+                                </p:cTn>
+                              </p:par>
+                            </p:childTnLst>
+                          </p:cTn>
+                        </p:par>
+                      </p:childTnLst>
+                    </p:cTn>
+                  </p:par>
+                  <p:par>
+                    <p:cTn id="7" fill="hold">
+                      <p:stCondLst>
+                        <p:cond delay="indefinite"/>
+                      </p:stCondLst>
+                      <p:childTnLst>
+                        <p:par>
+                          <p:cTn id="8" fill="hold">
+                            <p:stCondLst>
+                              <p:cond delay="0"/>
+                            </p:stCondLst>
+                            <p:childTnLst>
+                              <p:par>
+                                <p:cTn id="9" presetID="1" presetClass="entr" presetSubtype="0" fill="hold" nodeType="clickEffect">
+                                  <p:stCondLst>
+                                    <p:cond delay="0"/>
+                                  </p:stCondLst>
+                                  <p:childTnLst>
+                                    <p:set>
+                                      <p:cBhvr>
+                                        <p:cTn id="10" dur="1" fill="hold">
+                                          <p:stCondLst>
+                                            <p:cond delay="0"/>
+                                          </p:stCondLst>
+                                        </p:cTn>
+                                        <p:tgtEl>
+                                          <p:spTgt spid="245763">
+                                            <p:txEl>
+                                              <p:pRg st="1" end="1"/>
+                                            </p:txEl>
+                                          </p:spTgt>
+                                        </p:tgtEl>
+                                        <p:attrNameLst>
+                                          <p:attrName>style.visibility</p:attrName>
+                                        </p:attrNameLst>
+                                      </p:cBhvr>
+                                      <p:to>
+                                        <p:strVal val="visible"/>
+                                      </p:to>
+                                    </p:set>
+                                  </p:childTnLst>
+                                </p:cTn>
+                              </p:par>
+                            </p:childTnLst>
+                          </p:cTn>
+                        </p:par>
+                      </p:childTnLst>
+                    </p:cTn>
+                  </p:par>
+                  <p:par>
+                    <p:cTn id="11" fill="hold">
+                      <p:stCondLst>
+                        <p:cond delay="indefinite"/>
+                      </p:stCondLst>
+                      <p:childTnLst>
+                        <p:par>
+                          <p:cTn id="12" fill="hold">
+                            <p:stCondLst>
+                              <p:cond delay="0"/>
+                            </p:stCondLst>
+                            <p:childTnLst>
+                              <p:par>
+                                <p:cTn id="13" presetID="1" presetClass="entr" presetSubtype="0" fill="hold" grpId="0" nodeType="clickEffect">
+                                  <p:stCondLst>
+                                    <p:cond delay="0"/>
+                                  </p:stCondLst>
+                                  <p:childTnLst>
+                                    <p:set>
+                                      <p:cBhvr>
+                                        <p:cTn id="14" dur="1" fill="hold">
+                                          <p:stCondLst>
+                                            <p:cond delay="0"/>
+                                          </p:stCondLst>
+                                        </p:cTn>
+                                        <p:tgtEl>
+                                          <p:spTgt spid="3"/>
+                                        </p:tgtEl>
+                                        <p:attrNameLst>
+                                          <p:attrName>style.visibility</p:attrName>
+                                        </p:attrNameLst>
+                                      </p:cBhvr>
+                                      <p:to>
+                                        <p:strVal val="visible"/>
+                                      </p:to>
+                                    </p:set>
+                                  </p:childTnLst>
+                                </p:cTn>
+                              </p:par>
+                              <p:par>
+                                <p:cTn id="15" presetID="1" presetClass="entr" presetSubtype="0" fill="hold" grpId="0" nodeType="withEffect">
+                                  <p:stCondLst>
+                                    <p:cond delay="0"/>
+                                  </p:stCondLst>
+                                  <p:childTnLst>
+                                    <p:set>
+                                      <p:cBhvr>
+                                        <p:cTn id="16" dur="1" fill="hold">
+                                          <p:stCondLst>
+                                            <p:cond delay="0"/>
+                                          </p:stCondLst>
+                                        </p:cTn>
+                                        <p:tgtEl>
+                                          <p:spTgt spid="4"/>
+                                        </p:tgtEl>
+                                        <p:attrNameLst>
+                                          <p:attrName>style.visibility</p:attrName>
+                                        </p:attrNameLst>
+                                      </p:cBhvr>
+                                      <p:to>
+                                        <p:strVal val="visible"/>
+                                      </p:to>
+                                    </p:set>
+                                  </p:childTnLst>
+                                </p:cTn>
+                              </p:par>
+                              <p:par>
+                                <p:cTn id="17" presetID="1" presetClass="entr" presetSubtype="0" fill="hold" nodeType="withEffect">
+                                  <p:stCondLst>
+                                    <p:cond delay="0"/>
+                                  </p:stCondLst>
+                                  <p:childTnLst>
+                                    <p:set>
+                                      <p:cBhvr>
+                                        <p:cTn id="18" dur="1" fill="hold">
+                                          <p:stCondLst>
+                                            <p:cond delay="0"/>
+                                          </p:stCondLst>
+                                        </p:cTn>
+                                        <p:tgtEl>
+                                          <p:spTgt spid="6"/>
+                                        </p:tgtEl>
+                                        <p:attrNameLst>
+                                          <p:attrName>style.visibility</p:attrName>
+                                        </p:attrNameLst>
+                                      </p:cBhvr>
+                                      <p:to>
+                                        <p:strVal val="visible"/>
+                                      </p:to>
+                                    </p:set>
+                                  </p:childTnLst>
+                                </p:cTn>
+                              </p:par>
+                              <p:par>
+                                <p:cTn id="19" presetID="1" presetClass="entr" presetSubtype="0" fill="hold" nodeType="withEffect">
+                                  <p:stCondLst>
+                                    <p:cond delay="0"/>
+                                  </p:stCondLst>
+                                  <p:childTnLst>
+                                    <p:set>
+                                      <p:cBhvr>
+                                        <p:cTn id="20" dur="1" fill="hold">
+                                          <p:stCondLst>
+                                            <p:cond delay="0"/>
+                                          </p:stCondLst>
+                                        </p:cTn>
+                                        <p:tgtEl>
+                                          <p:spTgt spid="13"/>
+                                        </p:tgtEl>
+                                        <p:attrNameLst>
+                                          <p:attrName>style.visibility</p:attrName>
+                                        </p:attrNameLst>
+                                      </p:cBhvr>
+                                      <p:to>
+                                        <p:strVal val="visible"/>
+                                      </p:to>
+                                    </p:set>
+                                  </p:childTnLst>
+                                </p:cTn>
+                              </p:par>
+                            </p:childTnLst>
+                          </p:cTn>
+                        </p:par>
+                      </p:childTnLst>
+                    </p:cTn>
+                  </p:par>
+                  <p:par>
+                    <p:cTn id="21" fill="hold">
+                      <p:stCondLst>
+                        <p:cond delay="indefinite"/>
+                      </p:stCondLst>
+                      <p:childTnLst>
+                        <p:par>
+                          <p:cTn id="22" fill="hold">
+                            <p:stCondLst>
+                              <p:cond delay="0"/>
+                            </p:stCondLst>
+                            <p:childTnLst>
+                              <p:par>
+                                <p:cTn id="23" presetID="1" presetClass="entr" presetSubtype="0" fill="hold" grpId="0" nodeType="clickEffect">
+                                  <p:stCondLst>
+                                    <p:cond delay="0"/>
+                                  </p:stCondLst>
+                                  <p:childTnLst>
+                                    <p:set>
+                                      <p:cBhvr>
+                                        <p:cTn id="24" dur="1" fill="hold">
+                                          <p:stCondLst>
+                                            <p:cond delay="0"/>
+                                          </p:stCondLst>
+                                        </p:cTn>
+                                        <p:tgtEl>
+                                          <p:spTgt spid="2"/>
+                                        </p:tgtEl>
+                                        <p:attrNameLst>
+                                          <p:attrName>style.visibility</p:attrName>
+                                        </p:attrNameLst>
+                                      </p:cBhvr>
+                                      <p:to>
+                                        <p:strVal val="visible"/>
+                                      </p:to>
+                                    </p:set>
+                                  </p:childTnLst>
+                                </p:cTn>
+                              </p:par>
+                            </p:childTnLst>
+                          </p:cTn>
+                        </p:par>
+                      </p:childTnLst>
+                    </p:cTn>
+                  </p:par>
+                </p:childTnLst>
+              </p:cTn>
+              <p:prevCondLst>
+                <p:cond evt="onPrev" delay="0">
+                  <p:tgtEl>
+                    <p:sldTgt/>
+                  </p:tgtEl>
+                </p:cond>
+              </p:prevCondLst>
+              <p:nextCondLst>
+                <p:cond evt="onNext" delay="0">
+                  <p:tgtEl>
+                    <p:sldTgt/>
+                  </p:tgtEl>
+                </p:cond>
+              </p:nextCondLst>
+            </p:seq>
+          </p:childTnLst>
+        </p:cTn>
+      </p:par>
+    </p:tnLst>
+    <p:bldLst>
+      <p:bldP spid="2" grpId="0"/>
+      <p:bldP spid="3" grpId="0"/>
+      <p:bldP spid="4" grpId="0"/>
+    </p:bldLst>
+  </p:timing>
 </p:sld>
 </file>
 
@@ -21709,6 +24291,288 @@
   <p:clrMapOvr>
     <a:masterClrMapping/>
   </p:clrMapOvr>
+  <p:timing>
+    <p:tnLst>
+      <p:par>
+        <p:cTn id="1" dur="indefinite" restart="never" nodeType="tmRoot">
+          <p:childTnLst>
+            <p:seq concurrent="1" nextAc="seek">
+              <p:cTn id="2" dur="indefinite" nodeType="mainSeq">
+                <p:childTnLst>
+                  <p:par>
+                    <p:cTn id="3" fill="hold">
+                      <p:stCondLst>
+                        <p:cond delay="indefinite"/>
+                      </p:stCondLst>
+                      <p:childTnLst>
+                        <p:par>
+                          <p:cTn id="4" fill="hold">
+                            <p:stCondLst>
+                              <p:cond delay="0"/>
+                            </p:stCondLst>
+                            <p:childTnLst>
+                              <p:par>
+                                <p:cTn id="5" presetID="1" presetClass="entr" presetSubtype="0" fill="hold" grpId="0" nodeType="clickEffect">
+                                  <p:stCondLst>
+                                    <p:cond delay="0"/>
+                                  </p:stCondLst>
+                                  <p:childTnLst>
+                                    <p:set>
+                                      <p:cBhvr>
+                                        <p:cTn id="6" dur="1" fill="hold">
+                                          <p:stCondLst>
+                                            <p:cond delay="0"/>
+                                          </p:stCondLst>
+                                        </p:cTn>
+                                        <p:tgtEl>
+                                          <p:spTgt spid="41992"/>
+                                        </p:tgtEl>
+                                        <p:attrNameLst>
+                                          <p:attrName>style.visibility</p:attrName>
+                                        </p:attrNameLst>
+                                      </p:cBhvr>
+                                      <p:to>
+                                        <p:strVal val="visible"/>
+                                      </p:to>
+                                    </p:set>
+                                  </p:childTnLst>
+                                </p:cTn>
+                              </p:par>
+                              <p:par>
+                                <p:cTn id="7" presetID="1" presetClass="entr" presetSubtype="0" fill="hold" grpId="0" nodeType="withEffect">
+                                  <p:stCondLst>
+                                    <p:cond delay="0"/>
+                                  </p:stCondLst>
+                                  <p:childTnLst>
+                                    <p:set>
+                                      <p:cBhvr>
+                                        <p:cTn id="8" dur="1" fill="hold">
+                                          <p:stCondLst>
+                                            <p:cond delay="0"/>
+                                          </p:stCondLst>
+                                        </p:cTn>
+                                        <p:tgtEl>
+                                          <p:spTgt spid="41989"/>
+                                        </p:tgtEl>
+                                        <p:attrNameLst>
+                                          <p:attrName>style.visibility</p:attrName>
+                                        </p:attrNameLst>
+                                      </p:cBhvr>
+                                      <p:to>
+                                        <p:strVal val="visible"/>
+                                      </p:to>
+                                    </p:set>
+                                  </p:childTnLst>
+                                </p:cTn>
+                              </p:par>
+                              <p:par>
+                                <p:cTn id="9" presetID="1" presetClass="entr" presetSubtype="0" fill="hold" grpId="0" nodeType="withEffect">
+                                  <p:stCondLst>
+                                    <p:cond delay="0"/>
+                                  </p:stCondLst>
+                                  <p:childTnLst>
+                                    <p:set>
+                                      <p:cBhvr>
+                                        <p:cTn id="10" dur="1" fill="hold">
+                                          <p:stCondLst>
+                                            <p:cond delay="0"/>
+                                          </p:stCondLst>
+                                        </p:cTn>
+                                        <p:tgtEl>
+                                          <p:spTgt spid="41988"/>
+                                        </p:tgtEl>
+                                        <p:attrNameLst>
+                                          <p:attrName>style.visibility</p:attrName>
+                                        </p:attrNameLst>
+                                      </p:cBhvr>
+                                      <p:to>
+                                        <p:strVal val="visible"/>
+                                      </p:to>
+                                    </p:set>
+                                  </p:childTnLst>
+                                </p:cTn>
+                              </p:par>
+                            </p:childTnLst>
+                          </p:cTn>
+                        </p:par>
+                      </p:childTnLst>
+                    </p:cTn>
+                  </p:par>
+                  <p:par>
+                    <p:cTn id="11" fill="hold">
+                      <p:stCondLst>
+                        <p:cond delay="indefinite"/>
+                      </p:stCondLst>
+                      <p:childTnLst>
+                        <p:par>
+                          <p:cTn id="12" fill="hold">
+                            <p:stCondLst>
+                              <p:cond delay="0"/>
+                            </p:stCondLst>
+                            <p:childTnLst>
+                              <p:par>
+                                <p:cTn id="13" presetID="1" presetClass="entr" presetSubtype="0" fill="hold" grpId="0" nodeType="clickEffect">
+                                  <p:stCondLst>
+                                    <p:cond delay="0"/>
+                                  </p:stCondLst>
+                                  <p:childTnLst>
+                                    <p:set>
+                                      <p:cBhvr>
+                                        <p:cTn id="14" dur="1" fill="hold">
+                                          <p:stCondLst>
+                                            <p:cond delay="0"/>
+                                          </p:stCondLst>
+                                        </p:cTn>
+                                        <p:tgtEl>
+                                          <p:spTgt spid="41990"/>
+                                        </p:tgtEl>
+                                        <p:attrNameLst>
+                                          <p:attrName>style.visibility</p:attrName>
+                                        </p:attrNameLst>
+                                      </p:cBhvr>
+                                      <p:to>
+                                        <p:strVal val="visible"/>
+                                      </p:to>
+                                    </p:set>
+                                  </p:childTnLst>
+                                </p:cTn>
+                              </p:par>
+                              <p:par>
+                                <p:cTn id="15" presetID="1" presetClass="entr" presetSubtype="0" fill="hold" grpId="0" nodeType="withEffect">
+                                  <p:stCondLst>
+                                    <p:cond delay="0"/>
+                                  </p:stCondLst>
+                                  <p:childTnLst>
+                                    <p:set>
+                                      <p:cBhvr>
+                                        <p:cTn id="16" dur="1" fill="hold">
+                                          <p:stCondLst>
+                                            <p:cond delay="0"/>
+                                          </p:stCondLst>
+                                        </p:cTn>
+                                        <p:tgtEl>
+                                          <p:spTgt spid="41991"/>
+                                        </p:tgtEl>
+                                        <p:attrNameLst>
+                                          <p:attrName>style.visibility</p:attrName>
+                                        </p:attrNameLst>
+                                      </p:cBhvr>
+                                      <p:to>
+                                        <p:strVal val="visible"/>
+                                      </p:to>
+                                    </p:set>
+                                  </p:childTnLst>
+                                </p:cTn>
+                              </p:par>
+                              <p:par>
+                                <p:cTn id="17" presetID="1" presetClass="entr" presetSubtype="0" fill="hold" grpId="0" nodeType="withEffect">
+                                  <p:stCondLst>
+                                    <p:cond delay="0"/>
+                                  </p:stCondLst>
+                                  <p:childTnLst>
+                                    <p:set>
+                                      <p:cBhvr>
+                                        <p:cTn id="18" dur="1" fill="hold">
+                                          <p:stCondLst>
+                                            <p:cond delay="0"/>
+                                          </p:stCondLst>
+                                        </p:cTn>
+                                        <p:tgtEl>
+                                          <p:spTgt spid="9"/>
+                                        </p:tgtEl>
+                                        <p:attrNameLst>
+                                          <p:attrName>style.visibility</p:attrName>
+                                        </p:attrNameLst>
+                                      </p:cBhvr>
+                                      <p:to>
+                                        <p:strVal val="visible"/>
+                                      </p:to>
+                                    </p:set>
+                                  </p:childTnLst>
+                                </p:cTn>
+                              </p:par>
+                            </p:childTnLst>
+                          </p:cTn>
+                        </p:par>
+                      </p:childTnLst>
+                    </p:cTn>
+                  </p:par>
+                  <p:par>
+                    <p:cTn id="19" fill="hold">
+                      <p:stCondLst>
+                        <p:cond delay="indefinite"/>
+                      </p:stCondLst>
+                      <p:childTnLst>
+                        <p:par>
+                          <p:cTn id="20" fill="hold">
+                            <p:stCondLst>
+                              <p:cond delay="0"/>
+                            </p:stCondLst>
+                            <p:childTnLst>
+                              <p:par>
+                                <p:cTn id="21" presetID="1" presetClass="entr" presetSubtype="0" fill="hold" grpId="0" nodeType="clickEffect">
+                                  <p:stCondLst>
+                                    <p:cond delay="0"/>
+                                  </p:stCondLst>
+                                  <p:childTnLst>
+                                    <p:set>
+                                      <p:cBhvr>
+                                        <p:cTn id="22" dur="1" fill="hold">
+                                          <p:stCondLst>
+                                            <p:cond delay="0"/>
+                                          </p:stCondLst>
+                                        </p:cTn>
+                                        <p:tgtEl>
+                                          <p:spTgt spid="41993"/>
+                                        </p:tgtEl>
+                                        <p:attrNameLst>
+                                          <p:attrName>style.visibility</p:attrName>
+                                        </p:attrNameLst>
+                                      </p:cBhvr>
+                                      <p:to>
+                                        <p:strVal val="visible"/>
+                                      </p:to>
+                                    </p:set>
+                                  </p:childTnLst>
+                                </p:cTn>
+                              </p:par>
+                            </p:childTnLst>
+                          </p:cTn>
+                        </p:par>
+                      </p:childTnLst>
+                    </p:cTn>
+                  </p:par>
+                </p:childTnLst>
+              </p:cTn>
+              <p:prevCondLst>
+                <p:cond evt="onPrev" delay="0">
+                  <p:tgtEl>
+                    <p:sldTgt/>
+                  </p:tgtEl>
+                </p:cond>
+              </p:prevCondLst>
+              <p:nextCondLst>
+                <p:cond evt="onNext" delay="0">
+                  <p:tgtEl>
+                    <p:sldTgt/>
+                  </p:tgtEl>
+                </p:cond>
+              </p:nextCondLst>
+            </p:seq>
+          </p:childTnLst>
+        </p:cTn>
+      </p:par>
+    </p:tnLst>
+    <p:bldLst>
+      <p:bldP spid="41990" grpId="0"/>
+      <p:bldP spid="9" grpId="0"/>
+      <p:bldP spid="41988" grpId="0"/>
+      <p:bldP spid="41989" grpId="0"/>
+      <p:bldP spid="41991" grpId="0" animBg="1"/>
+      <p:bldP spid="41992" grpId="0" animBg="1"/>
+      <p:bldP spid="41993" grpId="0" animBg="1"/>
+    </p:bldLst>
+  </p:timing>
 </p:sld>
 </file>
 
@@ -22529,6 +25393,242 @@
   <p:clrMapOvr>
     <a:masterClrMapping/>
   </p:clrMapOvr>
+  <p:timing>
+    <p:tnLst>
+      <p:par>
+        <p:cTn id="1" dur="indefinite" restart="never" nodeType="tmRoot">
+          <p:childTnLst>
+            <p:seq concurrent="1" nextAc="seek">
+              <p:cTn id="2" dur="indefinite" nodeType="mainSeq">
+                <p:childTnLst>
+                  <p:par>
+                    <p:cTn id="3" fill="hold">
+                      <p:stCondLst>
+                        <p:cond delay="indefinite"/>
+                      </p:stCondLst>
+                      <p:childTnLst>
+                        <p:par>
+                          <p:cTn id="4" fill="hold">
+                            <p:stCondLst>
+                              <p:cond delay="0"/>
+                            </p:stCondLst>
+                            <p:childTnLst>
+                              <p:par>
+                                <p:cTn id="5" presetID="1" presetClass="entr" presetSubtype="0" fill="hold" grpId="0" nodeType="clickEffect">
+                                  <p:stCondLst>
+                                    <p:cond delay="0"/>
+                                  </p:stCondLst>
+                                  <p:childTnLst>
+                                    <p:set>
+                                      <p:cBhvr>
+                                        <p:cTn id="6" dur="1" fill="hold">
+                                          <p:stCondLst>
+                                            <p:cond delay="0"/>
+                                          </p:stCondLst>
+                                        </p:cTn>
+                                        <p:tgtEl>
+                                          <p:spTgt spid="43012"/>
+                                        </p:tgtEl>
+                                        <p:attrNameLst>
+                                          <p:attrName>style.visibility</p:attrName>
+                                        </p:attrNameLst>
+                                      </p:cBhvr>
+                                      <p:to>
+                                        <p:strVal val="visible"/>
+                                      </p:to>
+                                    </p:set>
+                                  </p:childTnLst>
+                                </p:cTn>
+                              </p:par>
+                              <p:par>
+                                <p:cTn id="7" presetID="1" presetClass="entr" presetSubtype="0" fill="hold" grpId="0" nodeType="withEffect">
+                                  <p:stCondLst>
+                                    <p:cond delay="0"/>
+                                  </p:stCondLst>
+                                  <p:childTnLst>
+                                    <p:set>
+                                      <p:cBhvr>
+                                        <p:cTn id="8" dur="1" fill="hold">
+                                          <p:stCondLst>
+                                            <p:cond delay="0"/>
+                                          </p:stCondLst>
+                                        </p:cTn>
+                                        <p:tgtEl>
+                                          <p:spTgt spid="43014"/>
+                                        </p:tgtEl>
+                                        <p:attrNameLst>
+                                          <p:attrName>style.visibility</p:attrName>
+                                        </p:attrNameLst>
+                                      </p:cBhvr>
+                                      <p:to>
+                                        <p:strVal val="visible"/>
+                                      </p:to>
+                                    </p:set>
+                                  </p:childTnLst>
+                                </p:cTn>
+                              </p:par>
+                              <p:par>
+                                <p:cTn id="9" presetID="1" presetClass="entr" presetSubtype="0" fill="hold" grpId="0" nodeType="withEffect">
+                                  <p:stCondLst>
+                                    <p:cond delay="0"/>
+                                  </p:stCondLst>
+                                  <p:childTnLst>
+                                    <p:set>
+                                      <p:cBhvr>
+                                        <p:cTn id="10" dur="1" fill="hold">
+                                          <p:stCondLst>
+                                            <p:cond delay="0"/>
+                                          </p:stCondLst>
+                                        </p:cTn>
+                                        <p:tgtEl>
+                                          <p:spTgt spid="8"/>
+                                        </p:tgtEl>
+                                        <p:attrNameLst>
+                                          <p:attrName>style.visibility</p:attrName>
+                                        </p:attrNameLst>
+                                      </p:cBhvr>
+                                      <p:to>
+                                        <p:strVal val="visible"/>
+                                      </p:to>
+                                    </p:set>
+                                  </p:childTnLst>
+                                </p:cTn>
+                              </p:par>
+                            </p:childTnLst>
+                          </p:cTn>
+                        </p:par>
+                      </p:childTnLst>
+                    </p:cTn>
+                  </p:par>
+                  <p:par>
+                    <p:cTn id="11" fill="hold">
+                      <p:stCondLst>
+                        <p:cond delay="indefinite"/>
+                      </p:stCondLst>
+                      <p:childTnLst>
+                        <p:par>
+                          <p:cTn id="12" fill="hold">
+                            <p:stCondLst>
+                              <p:cond delay="0"/>
+                            </p:stCondLst>
+                            <p:childTnLst>
+                              <p:par>
+                                <p:cTn id="13" presetID="1" presetClass="entr" presetSubtype="0" fill="hold" grpId="0" nodeType="clickEffect">
+                                  <p:stCondLst>
+                                    <p:cond delay="0"/>
+                                  </p:stCondLst>
+                                  <p:childTnLst>
+                                    <p:set>
+                                      <p:cBhvr>
+                                        <p:cTn id="14" dur="1" fill="hold">
+                                          <p:stCondLst>
+                                            <p:cond delay="0"/>
+                                          </p:stCondLst>
+                                        </p:cTn>
+                                        <p:tgtEl>
+                                          <p:spTgt spid="43013"/>
+                                        </p:tgtEl>
+                                        <p:attrNameLst>
+                                          <p:attrName>style.visibility</p:attrName>
+                                        </p:attrNameLst>
+                                      </p:cBhvr>
+                                      <p:to>
+                                        <p:strVal val="visible"/>
+                                      </p:to>
+                                    </p:set>
+                                  </p:childTnLst>
+                                </p:cTn>
+                              </p:par>
+                              <p:par>
+                                <p:cTn id="15" presetID="1" presetClass="entr" presetSubtype="0" fill="hold" grpId="0" nodeType="withEffect">
+                                  <p:stCondLst>
+                                    <p:cond delay="0"/>
+                                  </p:stCondLst>
+                                  <p:childTnLst>
+                                    <p:set>
+                                      <p:cBhvr>
+                                        <p:cTn id="16" dur="1" fill="hold">
+                                          <p:stCondLst>
+                                            <p:cond delay="0"/>
+                                          </p:stCondLst>
+                                        </p:cTn>
+                                        <p:tgtEl>
+                                          <p:spTgt spid="2"/>
+                                        </p:tgtEl>
+                                        <p:attrNameLst>
+                                          <p:attrName>style.visibility</p:attrName>
+                                        </p:attrNameLst>
+                                      </p:cBhvr>
+                                      <p:to>
+                                        <p:strVal val="visible"/>
+                                      </p:to>
+                                    </p:set>
+                                  </p:childTnLst>
+                                </p:cTn>
+                              </p:par>
+                              <p:par>
+                                <p:cTn id="17" presetID="1" presetClass="entr" presetSubtype="0" fill="hold" grpId="0" nodeType="withEffect">
+                                  <p:stCondLst>
+                                    <p:cond delay="0"/>
+                                  </p:stCondLst>
+                                  <p:childTnLst>
+                                    <p:set>
+                                      <p:cBhvr>
+                                        <p:cTn id="18" dur="1" fill="hold">
+                                          <p:stCondLst>
+                                            <p:cond delay="0"/>
+                                          </p:stCondLst>
+                                        </p:cTn>
+                                        <p:tgtEl>
+                                          <p:spTgt spid="43015"/>
+                                        </p:tgtEl>
+                                        <p:attrNameLst>
+                                          <p:attrName>style.visibility</p:attrName>
+                                        </p:attrNameLst>
+                                      </p:cBhvr>
+                                      <p:to>
+                                        <p:strVal val="visible"/>
+                                      </p:to>
+                                    </p:set>
+                                  </p:childTnLst>
+                                </p:cTn>
+                              </p:par>
+                            </p:childTnLst>
+                          </p:cTn>
+                        </p:par>
+                      </p:childTnLst>
+                    </p:cTn>
+                  </p:par>
+                </p:childTnLst>
+              </p:cTn>
+              <p:prevCondLst>
+                <p:cond evt="onPrev" delay="0">
+                  <p:tgtEl>
+                    <p:sldTgt/>
+                  </p:tgtEl>
+                </p:cond>
+              </p:prevCondLst>
+              <p:nextCondLst>
+                <p:cond evt="onNext" delay="0">
+                  <p:tgtEl>
+                    <p:sldTgt/>
+                  </p:tgtEl>
+                </p:cond>
+              </p:nextCondLst>
+            </p:seq>
+          </p:childTnLst>
+        </p:cTn>
+      </p:par>
+    </p:tnLst>
+    <p:bldLst>
+      <p:bldP spid="43012" grpId="0" animBg="1"/>
+      <p:bldP spid="43013" grpId="0" animBg="1"/>
+      <p:bldP spid="43014" grpId="0" animBg="1"/>
+      <p:bldP spid="43015" grpId="0" animBg="1"/>
+      <p:bldP spid="2" grpId="0"/>
+      <p:bldP spid="8" grpId="0"/>
+    </p:bldLst>
+  </p:timing>
 </p:sld>
 </file>
 
@@ -22717,6 +25817,356 @@
   <p:clrMapOvr>
     <a:masterClrMapping/>
   </p:clrMapOvr>
+  <p:timing>
+    <p:tnLst>
+      <p:par>
+        <p:cTn id="1" dur="indefinite" restart="never" nodeType="tmRoot">
+          <p:childTnLst>
+            <p:seq concurrent="1" nextAc="seek">
+              <p:cTn id="2" dur="indefinite" nodeType="mainSeq">
+                <p:childTnLst>
+                  <p:par>
+                    <p:cTn id="3" fill="hold">
+                      <p:stCondLst>
+                        <p:cond delay="indefinite"/>
+                      </p:stCondLst>
+                      <p:childTnLst>
+                        <p:par>
+                          <p:cTn id="4" fill="hold">
+                            <p:stCondLst>
+                              <p:cond delay="0"/>
+                            </p:stCondLst>
+                            <p:childTnLst>
+                              <p:par>
+                                <p:cTn id="5" presetID="1" presetClass="entr" presetSubtype="0" fill="hold" nodeType="clickEffect">
+                                  <p:stCondLst>
+                                    <p:cond delay="0"/>
+                                  </p:stCondLst>
+                                  <p:childTnLst>
+                                    <p:set>
+                                      <p:cBhvr>
+                                        <p:cTn id="6" dur="1" fill="hold">
+                                          <p:stCondLst>
+                                            <p:cond delay="0"/>
+                                          </p:stCondLst>
+                                        </p:cTn>
+                                        <p:tgtEl>
+                                          <p:spTgt spid="167939">
+                                            <p:txEl>
+                                              <p:pRg st="0" end="0"/>
+                                            </p:txEl>
+                                          </p:spTgt>
+                                        </p:tgtEl>
+                                        <p:attrNameLst>
+                                          <p:attrName>style.visibility</p:attrName>
+                                        </p:attrNameLst>
+                                      </p:cBhvr>
+                                      <p:to>
+                                        <p:strVal val="visible"/>
+                                      </p:to>
+                                    </p:set>
+                                  </p:childTnLst>
+                                </p:cTn>
+                              </p:par>
+                            </p:childTnLst>
+                          </p:cTn>
+                        </p:par>
+                      </p:childTnLst>
+                    </p:cTn>
+                  </p:par>
+                  <p:par>
+                    <p:cTn id="7" fill="hold">
+                      <p:stCondLst>
+                        <p:cond delay="indefinite"/>
+                      </p:stCondLst>
+                      <p:childTnLst>
+                        <p:par>
+                          <p:cTn id="8" fill="hold">
+                            <p:stCondLst>
+                              <p:cond delay="0"/>
+                            </p:stCondLst>
+                            <p:childTnLst>
+                              <p:par>
+                                <p:cTn id="9" presetID="1" presetClass="entr" presetSubtype="0" fill="hold" nodeType="clickEffect">
+                                  <p:stCondLst>
+                                    <p:cond delay="0"/>
+                                  </p:stCondLst>
+                                  <p:childTnLst>
+                                    <p:set>
+                                      <p:cBhvr>
+                                        <p:cTn id="10" dur="1" fill="hold">
+                                          <p:stCondLst>
+                                            <p:cond delay="0"/>
+                                          </p:stCondLst>
+                                        </p:cTn>
+                                        <p:tgtEl>
+                                          <p:spTgt spid="167939">
+                                            <p:txEl>
+                                              <p:pRg st="1" end="1"/>
+                                            </p:txEl>
+                                          </p:spTgt>
+                                        </p:tgtEl>
+                                        <p:attrNameLst>
+                                          <p:attrName>style.visibility</p:attrName>
+                                        </p:attrNameLst>
+                                      </p:cBhvr>
+                                      <p:to>
+                                        <p:strVal val="visible"/>
+                                      </p:to>
+                                    </p:set>
+                                  </p:childTnLst>
+                                </p:cTn>
+                              </p:par>
+                              <p:par>
+                                <p:cTn id="11" presetID="1" presetClass="entr" presetSubtype="0" fill="hold" nodeType="withEffect">
+                                  <p:stCondLst>
+                                    <p:cond delay="0"/>
+                                  </p:stCondLst>
+                                  <p:childTnLst>
+                                    <p:set>
+                                      <p:cBhvr>
+                                        <p:cTn id="12" dur="1" fill="hold">
+                                          <p:stCondLst>
+                                            <p:cond delay="0"/>
+                                          </p:stCondLst>
+                                        </p:cTn>
+                                        <p:tgtEl>
+                                          <p:spTgt spid="167939">
+                                            <p:txEl>
+                                              <p:pRg st="2" end="2"/>
+                                            </p:txEl>
+                                          </p:spTgt>
+                                        </p:tgtEl>
+                                        <p:attrNameLst>
+                                          <p:attrName>style.visibility</p:attrName>
+                                        </p:attrNameLst>
+                                      </p:cBhvr>
+                                      <p:to>
+                                        <p:strVal val="visible"/>
+                                      </p:to>
+                                    </p:set>
+                                  </p:childTnLst>
+                                </p:cTn>
+                              </p:par>
+                              <p:par>
+                                <p:cTn id="13" presetID="1" presetClass="entr" presetSubtype="0" fill="hold" nodeType="withEffect">
+                                  <p:stCondLst>
+                                    <p:cond delay="0"/>
+                                  </p:stCondLst>
+                                  <p:childTnLst>
+                                    <p:set>
+                                      <p:cBhvr>
+                                        <p:cTn id="14" dur="1" fill="hold">
+                                          <p:stCondLst>
+                                            <p:cond delay="0"/>
+                                          </p:stCondLst>
+                                        </p:cTn>
+                                        <p:tgtEl>
+                                          <p:spTgt spid="167939">
+                                            <p:txEl>
+                                              <p:pRg st="3" end="3"/>
+                                            </p:txEl>
+                                          </p:spTgt>
+                                        </p:tgtEl>
+                                        <p:attrNameLst>
+                                          <p:attrName>style.visibility</p:attrName>
+                                        </p:attrNameLst>
+                                      </p:cBhvr>
+                                      <p:to>
+                                        <p:strVal val="visible"/>
+                                      </p:to>
+                                    </p:set>
+                                  </p:childTnLst>
+                                </p:cTn>
+                              </p:par>
+                              <p:par>
+                                <p:cTn id="15" presetID="1" presetClass="entr" presetSubtype="0" fill="hold" nodeType="withEffect">
+                                  <p:stCondLst>
+                                    <p:cond delay="0"/>
+                                  </p:stCondLst>
+                                  <p:childTnLst>
+                                    <p:set>
+                                      <p:cBhvr>
+                                        <p:cTn id="16" dur="1" fill="hold">
+                                          <p:stCondLst>
+                                            <p:cond delay="0"/>
+                                          </p:stCondLst>
+                                        </p:cTn>
+                                        <p:tgtEl>
+                                          <p:spTgt spid="167939">
+                                            <p:txEl>
+                                              <p:pRg st="4" end="4"/>
+                                            </p:txEl>
+                                          </p:spTgt>
+                                        </p:tgtEl>
+                                        <p:attrNameLst>
+                                          <p:attrName>style.visibility</p:attrName>
+                                        </p:attrNameLst>
+                                      </p:cBhvr>
+                                      <p:to>
+                                        <p:strVal val="visible"/>
+                                      </p:to>
+                                    </p:set>
+                                  </p:childTnLst>
+                                </p:cTn>
+                              </p:par>
+                              <p:par>
+                                <p:cTn id="17" presetID="1" presetClass="entr" presetSubtype="0" fill="hold" nodeType="withEffect">
+                                  <p:stCondLst>
+                                    <p:cond delay="0"/>
+                                  </p:stCondLst>
+                                  <p:childTnLst>
+                                    <p:set>
+                                      <p:cBhvr>
+                                        <p:cTn id="18" dur="1" fill="hold">
+                                          <p:stCondLst>
+                                            <p:cond delay="0"/>
+                                          </p:stCondLst>
+                                        </p:cTn>
+                                        <p:tgtEl>
+                                          <p:spTgt spid="167939">
+                                            <p:txEl>
+                                              <p:pRg st="5" end="5"/>
+                                            </p:txEl>
+                                          </p:spTgt>
+                                        </p:tgtEl>
+                                        <p:attrNameLst>
+                                          <p:attrName>style.visibility</p:attrName>
+                                        </p:attrNameLst>
+                                      </p:cBhvr>
+                                      <p:to>
+                                        <p:strVal val="visible"/>
+                                      </p:to>
+                                    </p:set>
+                                  </p:childTnLst>
+                                </p:cTn>
+                              </p:par>
+                            </p:childTnLst>
+                          </p:cTn>
+                        </p:par>
+                      </p:childTnLst>
+                    </p:cTn>
+                  </p:par>
+                  <p:par>
+                    <p:cTn id="19" fill="hold">
+                      <p:stCondLst>
+                        <p:cond delay="indefinite"/>
+                      </p:stCondLst>
+                      <p:childTnLst>
+                        <p:par>
+                          <p:cTn id="20" fill="hold">
+                            <p:stCondLst>
+                              <p:cond delay="0"/>
+                            </p:stCondLst>
+                            <p:childTnLst>
+                              <p:par>
+                                <p:cTn id="21" presetID="1" presetClass="entr" presetSubtype="0" fill="hold" nodeType="clickEffect">
+                                  <p:stCondLst>
+                                    <p:cond delay="0"/>
+                                  </p:stCondLst>
+                                  <p:childTnLst>
+                                    <p:set>
+                                      <p:cBhvr>
+                                        <p:cTn id="22" dur="1" fill="hold">
+                                          <p:stCondLst>
+                                            <p:cond delay="0"/>
+                                          </p:stCondLst>
+                                        </p:cTn>
+                                        <p:tgtEl>
+                                          <p:spTgt spid="167939">
+                                            <p:txEl>
+                                              <p:pRg st="6" end="6"/>
+                                            </p:txEl>
+                                          </p:spTgt>
+                                        </p:tgtEl>
+                                        <p:attrNameLst>
+                                          <p:attrName>style.visibility</p:attrName>
+                                        </p:attrNameLst>
+                                      </p:cBhvr>
+                                      <p:to>
+                                        <p:strVal val="visible"/>
+                                      </p:to>
+                                    </p:set>
+                                  </p:childTnLst>
+                                </p:cTn>
+                              </p:par>
+                            </p:childTnLst>
+                          </p:cTn>
+                        </p:par>
+                      </p:childTnLst>
+                    </p:cTn>
+                  </p:par>
+                  <p:par>
+                    <p:cTn id="23" fill="hold">
+                      <p:stCondLst>
+                        <p:cond delay="indefinite"/>
+                      </p:stCondLst>
+                      <p:childTnLst>
+                        <p:par>
+                          <p:cTn id="24" fill="hold">
+                            <p:stCondLst>
+                              <p:cond delay="0"/>
+                            </p:stCondLst>
+                            <p:childTnLst>
+                              <p:par>
+                                <p:cTn id="25" presetID="1" presetClass="entr" presetSubtype="0" fill="hold" nodeType="clickEffect">
+                                  <p:stCondLst>
+                                    <p:cond delay="0"/>
+                                  </p:stCondLst>
+                                  <p:childTnLst>
+                                    <p:set>
+                                      <p:cBhvr>
+                                        <p:cTn id="26" dur="1" fill="hold">
+                                          <p:stCondLst>
+                                            <p:cond delay="0"/>
+                                          </p:stCondLst>
+                                        </p:cTn>
+                                        <p:tgtEl>
+                                          <p:spTgt spid="167939">
+                                            <p:txEl>
+                                              <p:pRg st="7" end="7"/>
+                                            </p:txEl>
+                                          </p:spTgt>
+                                        </p:tgtEl>
+                                        <p:attrNameLst>
+                                          <p:attrName>style.visibility</p:attrName>
+                                        </p:attrNameLst>
+                                      </p:cBhvr>
+                                      <p:to>
+                                        <p:strVal val="visible"/>
+                                      </p:to>
+                                    </p:set>
+                                  </p:childTnLst>
+                                </p:cTn>
+                              </p:par>
+                            </p:childTnLst>
+                          </p:cTn>
+                        </p:par>
+                      </p:childTnLst>
+                    </p:cTn>
+                  </p:par>
+                </p:childTnLst>
+              </p:cTn>
+              <p:prevCondLst>
+                <p:cond evt="onPrev" delay="0">
+                  <p:tgtEl>
+                    <p:sldTgt/>
+                  </p:tgtEl>
+                </p:cond>
+              </p:prevCondLst>
+              <p:nextCondLst>
+                <p:cond evt="onNext" delay="0">
+                  <p:tgtEl>
+                    <p:sldTgt/>
+                  </p:tgtEl>
+                </p:cond>
+              </p:nextCondLst>
+            </p:seq>
+          </p:childTnLst>
+        </p:cTn>
+      </p:par>
+    </p:tnLst>
+  </p:timing>
 </p:sld>
 </file>
 
@@ -23367,6 +26817,238 @@
   <p:clrMapOvr>
     <a:masterClrMapping/>
   </p:clrMapOvr>
+  <p:timing>
+    <p:tnLst>
+      <p:par>
+        <p:cTn id="1" dur="indefinite" restart="never" nodeType="tmRoot">
+          <p:childTnLst>
+            <p:seq concurrent="1" nextAc="seek">
+              <p:cTn id="2" dur="indefinite" nodeType="mainSeq">
+                <p:childTnLst>
+                  <p:par>
+                    <p:cTn id="3" fill="hold">
+                      <p:stCondLst>
+                        <p:cond delay="indefinite"/>
+                      </p:stCondLst>
+                      <p:childTnLst>
+                        <p:par>
+                          <p:cTn id="4" fill="hold">
+                            <p:stCondLst>
+                              <p:cond delay="0"/>
+                            </p:stCondLst>
+                            <p:childTnLst>
+                              <p:par>
+                                <p:cTn id="5" presetID="1" presetClass="entr" presetSubtype="0" fill="hold" grpId="0" nodeType="clickEffect">
+                                  <p:stCondLst>
+                                    <p:cond delay="0"/>
+                                  </p:stCondLst>
+                                  <p:childTnLst>
+                                    <p:set>
+                                      <p:cBhvr>
+                                        <p:cTn id="6" dur="1" fill="hold">
+                                          <p:stCondLst>
+                                            <p:cond delay="0"/>
+                                          </p:stCondLst>
+                                        </p:cTn>
+                                        <p:tgtEl>
+                                          <p:spTgt spid="18"/>
+                                        </p:tgtEl>
+                                        <p:attrNameLst>
+                                          <p:attrName>style.visibility</p:attrName>
+                                        </p:attrNameLst>
+                                      </p:cBhvr>
+                                      <p:to>
+                                        <p:strVal val="visible"/>
+                                      </p:to>
+                                    </p:set>
+                                  </p:childTnLst>
+                                </p:cTn>
+                              </p:par>
+                              <p:par>
+                                <p:cTn id="7" presetID="1" presetClass="entr" presetSubtype="0" fill="hold" nodeType="withEffect">
+                                  <p:stCondLst>
+                                    <p:cond delay="0"/>
+                                  </p:stCondLst>
+                                  <p:childTnLst>
+                                    <p:set>
+                                      <p:cBhvr>
+                                        <p:cTn id="8" dur="1" fill="hold">
+                                          <p:stCondLst>
+                                            <p:cond delay="0"/>
+                                          </p:stCondLst>
+                                        </p:cTn>
+                                        <p:tgtEl>
+                                          <p:spTgt spid="20"/>
+                                        </p:tgtEl>
+                                        <p:attrNameLst>
+                                          <p:attrName>style.visibility</p:attrName>
+                                        </p:attrNameLst>
+                                      </p:cBhvr>
+                                      <p:to>
+                                        <p:strVal val="visible"/>
+                                      </p:to>
+                                    </p:set>
+                                  </p:childTnLst>
+                                </p:cTn>
+                              </p:par>
+                              <p:par>
+                                <p:cTn id="9" presetID="1" presetClass="entr" presetSubtype="0" fill="hold" nodeType="withEffect">
+                                  <p:stCondLst>
+                                    <p:cond delay="0"/>
+                                  </p:stCondLst>
+                                  <p:childTnLst>
+                                    <p:set>
+                                      <p:cBhvr>
+                                        <p:cTn id="10" dur="1" fill="hold">
+                                          <p:stCondLst>
+                                            <p:cond delay="0"/>
+                                          </p:stCondLst>
+                                        </p:cTn>
+                                        <p:tgtEl>
+                                          <p:spTgt spid="9"/>
+                                        </p:tgtEl>
+                                        <p:attrNameLst>
+                                          <p:attrName>style.visibility</p:attrName>
+                                        </p:attrNameLst>
+                                      </p:cBhvr>
+                                      <p:to>
+                                        <p:strVal val="visible"/>
+                                      </p:to>
+                                    </p:set>
+                                  </p:childTnLst>
+                                </p:cTn>
+                              </p:par>
+                            </p:childTnLst>
+                          </p:cTn>
+                        </p:par>
+                      </p:childTnLst>
+                    </p:cTn>
+                  </p:par>
+                  <p:par>
+                    <p:cTn id="11" fill="hold">
+                      <p:stCondLst>
+                        <p:cond delay="indefinite"/>
+                      </p:stCondLst>
+                      <p:childTnLst>
+                        <p:par>
+                          <p:cTn id="12" fill="hold">
+                            <p:stCondLst>
+                              <p:cond delay="0"/>
+                            </p:stCondLst>
+                            <p:childTnLst>
+                              <p:par>
+                                <p:cTn id="13" presetID="1" presetClass="entr" presetSubtype="0" fill="hold" nodeType="clickEffect">
+                                  <p:stCondLst>
+                                    <p:cond delay="0"/>
+                                  </p:stCondLst>
+                                  <p:childTnLst>
+                                    <p:set>
+                                      <p:cBhvr>
+                                        <p:cTn id="14" dur="1" fill="hold">
+                                          <p:stCondLst>
+                                            <p:cond delay="0"/>
+                                          </p:stCondLst>
+                                        </p:cTn>
+                                        <p:tgtEl>
+                                          <p:spTgt spid="23"/>
+                                        </p:tgtEl>
+                                        <p:attrNameLst>
+                                          <p:attrName>style.visibility</p:attrName>
+                                        </p:attrNameLst>
+                                      </p:cBhvr>
+                                      <p:to>
+                                        <p:strVal val="visible"/>
+                                      </p:to>
+                                    </p:set>
+                                  </p:childTnLst>
+                                </p:cTn>
+                              </p:par>
+                              <p:par>
+                                <p:cTn id="15" presetID="1" presetClass="entr" presetSubtype="0" fill="hold" grpId="0" nodeType="withEffect">
+                                  <p:stCondLst>
+                                    <p:cond delay="0"/>
+                                  </p:stCondLst>
+                                  <p:childTnLst>
+                                    <p:set>
+                                      <p:cBhvr>
+                                        <p:cTn id="16" dur="1" fill="hold">
+                                          <p:stCondLst>
+                                            <p:cond delay="0"/>
+                                          </p:stCondLst>
+                                        </p:cTn>
+                                        <p:tgtEl>
+                                          <p:spTgt spid="19"/>
+                                        </p:tgtEl>
+                                        <p:attrNameLst>
+                                          <p:attrName>style.visibility</p:attrName>
+                                        </p:attrNameLst>
+                                      </p:cBhvr>
+                                      <p:to>
+                                        <p:strVal val="visible"/>
+                                      </p:to>
+                                    </p:set>
+                                  </p:childTnLst>
+                                </p:cTn>
+                              </p:par>
+                              <p:par>
+                                <p:cTn id="17" presetID="1" presetClass="entr" presetSubtype="0" fill="hold" nodeType="withEffect">
+                                  <p:stCondLst>
+                                    <p:cond delay="0"/>
+                                  </p:stCondLst>
+                                  <p:childTnLst>
+                                    <p:set>
+                                      <p:cBhvr>
+                                        <p:cTn id="18" dur="1" fill="hold">
+                                          <p:stCondLst>
+                                            <p:cond delay="0"/>
+                                          </p:stCondLst>
+                                        </p:cTn>
+                                        <p:tgtEl>
+                                          <p:spTgt spid="10"/>
+                                        </p:tgtEl>
+                                        <p:attrNameLst>
+                                          <p:attrName>style.visibility</p:attrName>
+                                        </p:attrNameLst>
+                                      </p:cBhvr>
+                                      <p:to>
+                                        <p:strVal val="visible"/>
+                                      </p:to>
+                                    </p:set>
+                                  </p:childTnLst>
+                                </p:cTn>
+                              </p:par>
+                            </p:childTnLst>
+                          </p:cTn>
+                        </p:par>
+                      </p:childTnLst>
+                    </p:cTn>
+                  </p:par>
+                </p:childTnLst>
+              </p:cTn>
+              <p:prevCondLst>
+                <p:cond evt="onPrev" delay="0">
+                  <p:tgtEl>
+                    <p:sldTgt/>
+                  </p:tgtEl>
+                </p:cond>
+              </p:prevCondLst>
+              <p:nextCondLst>
+                <p:cond evt="onNext" delay="0">
+                  <p:tgtEl>
+                    <p:sldTgt/>
+                  </p:tgtEl>
+                </p:cond>
+              </p:nextCondLst>
+            </p:seq>
+          </p:childTnLst>
+        </p:cTn>
+      </p:par>
+    </p:tnLst>
+    <p:bldLst>
+      <p:bldP spid="18" grpId="0" animBg="1"/>
+      <p:bldP spid="19" grpId="0" animBg="1"/>
+    </p:bldLst>
+  </p:timing>
 </p:sld>
 </file>
 
@@ -24054,6 +27736,134 @@
   <p:clrMapOvr>
     <a:masterClrMapping/>
   </p:clrMapOvr>
+  <p:timing>
+    <p:tnLst>
+      <p:par>
+        <p:cTn id="1" dur="indefinite" restart="never" nodeType="tmRoot">
+          <p:childTnLst>
+            <p:seq concurrent="1" nextAc="seek">
+              <p:cTn id="2" dur="indefinite" nodeType="mainSeq">
+                <p:childTnLst>
+                  <p:par>
+                    <p:cTn id="3" fill="hold">
+                      <p:stCondLst>
+                        <p:cond delay="indefinite"/>
+                      </p:stCondLst>
+                      <p:childTnLst>
+                        <p:par>
+                          <p:cTn id="4" fill="hold">
+                            <p:stCondLst>
+                              <p:cond delay="0"/>
+                            </p:stCondLst>
+                            <p:childTnLst>
+                              <p:par>
+                                <p:cTn id="5" presetID="1" presetClass="entr" presetSubtype="0" fill="hold" nodeType="clickEffect">
+                                  <p:stCondLst>
+                                    <p:cond delay="0"/>
+                                  </p:stCondLst>
+                                  <p:childTnLst>
+                                    <p:set>
+                                      <p:cBhvr>
+                                        <p:cTn id="6" dur="1" fill="hold">
+                                          <p:stCondLst>
+                                            <p:cond delay="0"/>
+                                          </p:stCondLst>
+                                        </p:cTn>
+                                        <p:tgtEl>
+                                          <p:spTgt spid="7">
+                                            <p:txEl>
+                                              <p:pRg st="2" end="2"/>
+                                            </p:txEl>
+                                          </p:spTgt>
+                                        </p:tgtEl>
+                                        <p:attrNameLst>
+                                          <p:attrName>style.visibility</p:attrName>
+                                        </p:attrNameLst>
+                                      </p:cBhvr>
+                                      <p:to>
+                                        <p:strVal val="visible"/>
+                                      </p:to>
+                                    </p:set>
+                                  </p:childTnLst>
+                                </p:cTn>
+                              </p:par>
+                            </p:childTnLst>
+                          </p:cTn>
+                        </p:par>
+                      </p:childTnLst>
+                    </p:cTn>
+                  </p:par>
+                  <p:par>
+                    <p:cTn id="7" fill="hold">
+                      <p:stCondLst>
+                        <p:cond delay="indefinite"/>
+                      </p:stCondLst>
+                      <p:childTnLst>
+                        <p:par>
+                          <p:cTn id="8" fill="hold">
+                            <p:stCondLst>
+                              <p:cond delay="0"/>
+                            </p:stCondLst>
+                            <p:childTnLst>
+                              <p:par>
+                                <p:cTn id="9" presetID="1" presetClass="entr" presetSubtype="0" fill="hold" nodeType="clickEffect">
+                                  <p:stCondLst>
+                                    <p:cond delay="0"/>
+                                  </p:stCondLst>
+                                  <p:childTnLst>
+                                    <p:set>
+                                      <p:cBhvr>
+                                        <p:cTn id="10" dur="1" fill="hold">
+                                          <p:stCondLst>
+                                            <p:cond delay="0"/>
+                                          </p:stCondLst>
+                                        </p:cTn>
+                                        <p:tgtEl>
+                                          <p:spTgt spid="7">
+                                            <p:txEl>
+                                              <p:pRg st="3" end="3"/>
+                                            </p:txEl>
+                                          </p:spTgt>
+                                        </p:tgtEl>
+                                        <p:attrNameLst>
+                                          <p:attrName>style.visibility</p:attrName>
+                                        </p:attrNameLst>
+                                      </p:cBhvr>
+                                      <p:to>
+                                        <p:strVal val="visible"/>
+                                      </p:to>
+                                    </p:set>
+                                  </p:childTnLst>
+                                </p:cTn>
+                              </p:par>
+                            </p:childTnLst>
+                          </p:cTn>
+                        </p:par>
+                      </p:childTnLst>
+                    </p:cTn>
+                  </p:par>
+                </p:childTnLst>
+              </p:cTn>
+              <p:prevCondLst>
+                <p:cond evt="onPrev" delay="0">
+                  <p:tgtEl>
+                    <p:sldTgt/>
+                  </p:tgtEl>
+                </p:cond>
+              </p:prevCondLst>
+              <p:nextCondLst>
+                <p:cond evt="onNext" delay="0">
+                  <p:tgtEl>
+                    <p:sldTgt/>
+                  </p:tgtEl>
+                </p:cond>
+              </p:nextCondLst>
+            </p:seq>
+          </p:childTnLst>
+        </p:cTn>
+      </p:par>
+    </p:tnLst>
+  </p:timing>
 </p:sld>
 </file>
 
@@ -24696,6 +28506,286 @@
   <p:clrMapOvr>
     <a:masterClrMapping/>
   </p:clrMapOvr>
+  <p:timing>
+    <p:tnLst>
+      <p:par>
+        <p:cTn id="1" dur="indefinite" restart="never" nodeType="tmRoot">
+          <p:childTnLst>
+            <p:seq concurrent="1" nextAc="seek">
+              <p:cTn id="2" dur="indefinite" nodeType="mainSeq">
+                <p:childTnLst>
+                  <p:par>
+                    <p:cTn id="3" fill="hold">
+                      <p:stCondLst>
+                        <p:cond delay="indefinite"/>
+                      </p:stCondLst>
+                      <p:childTnLst>
+                        <p:par>
+                          <p:cTn id="4" fill="hold">
+                            <p:stCondLst>
+                              <p:cond delay="0"/>
+                            </p:stCondLst>
+                            <p:childTnLst>
+                              <p:par>
+                                <p:cTn id="5" presetID="1" presetClass="entr" presetSubtype="0" fill="hold" grpId="0" nodeType="clickEffect">
+                                  <p:stCondLst>
+                                    <p:cond delay="0"/>
+                                  </p:stCondLst>
+                                  <p:childTnLst>
+                                    <p:set>
+                                      <p:cBhvr>
+                                        <p:cTn id="6" dur="1" fill="hold">
+                                          <p:stCondLst>
+                                            <p:cond delay="0"/>
+                                          </p:stCondLst>
+                                        </p:cTn>
+                                        <p:tgtEl>
+                                          <p:spTgt spid="14"/>
+                                        </p:tgtEl>
+                                        <p:attrNameLst>
+                                          <p:attrName>style.visibility</p:attrName>
+                                        </p:attrNameLst>
+                                      </p:cBhvr>
+                                      <p:to>
+                                        <p:strVal val="visible"/>
+                                      </p:to>
+                                    </p:set>
+                                  </p:childTnLst>
+                                </p:cTn>
+                              </p:par>
+                            </p:childTnLst>
+                          </p:cTn>
+                        </p:par>
+                      </p:childTnLst>
+                    </p:cTn>
+                  </p:par>
+                  <p:par>
+                    <p:cTn id="7" fill="hold">
+                      <p:stCondLst>
+                        <p:cond delay="indefinite"/>
+                      </p:stCondLst>
+                      <p:childTnLst>
+                        <p:par>
+                          <p:cTn id="8" fill="hold">
+                            <p:stCondLst>
+                              <p:cond delay="0"/>
+                            </p:stCondLst>
+                            <p:childTnLst>
+                              <p:par>
+                                <p:cTn id="9" presetID="1" presetClass="entr" presetSubtype="0" fill="hold" nodeType="clickEffect">
+                                  <p:stCondLst>
+                                    <p:cond delay="0"/>
+                                  </p:stCondLst>
+                                  <p:childTnLst>
+                                    <p:set>
+                                      <p:cBhvr>
+                                        <p:cTn id="10" dur="1" fill="hold">
+                                          <p:stCondLst>
+                                            <p:cond delay="0"/>
+                                          </p:stCondLst>
+                                        </p:cTn>
+                                        <p:tgtEl>
+                                          <p:spTgt spid="11"/>
+                                        </p:tgtEl>
+                                        <p:attrNameLst>
+                                          <p:attrName>style.visibility</p:attrName>
+                                        </p:attrNameLst>
+                                      </p:cBhvr>
+                                      <p:to>
+                                        <p:strVal val="visible"/>
+                                      </p:to>
+                                    </p:set>
+                                  </p:childTnLst>
+                                </p:cTn>
+                              </p:par>
+                              <p:par>
+                                <p:cTn id="11" presetID="1" presetClass="entr" presetSubtype="0" fill="hold" grpId="0" nodeType="withEffect">
+                                  <p:stCondLst>
+                                    <p:cond delay="0"/>
+                                  </p:stCondLst>
+                                  <p:childTnLst>
+                                    <p:set>
+                                      <p:cBhvr>
+                                        <p:cTn id="12" dur="1" fill="hold">
+                                          <p:stCondLst>
+                                            <p:cond delay="0"/>
+                                          </p:stCondLst>
+                                        </p:cTn>
+                                        <p:tgtEl>
+                                          <p:spTgt spid="18"/>
+                                        </p:tgtEl>
+                                        <p:attrNameLst>
+                                          <p:attrName>style.visibility</p:attrName>
+                                        </p:attrNameLst>
+                                      </p:cBhvr>
+                                      <p:to>
+                                        <p:strVal val="visible"/>
+                                      </p:to>
+                                    </p:set>
+                                  </p:childTnLst>
+                                </p:cTn>
+                              </p:par>
+                              <p:par>
+                                <p:cTn id="13" presetID="1" presetClass="entr" presetSubtype="0" fill="hold" grpId="0" nodeType="withEffect">
+                                  <p:stCondLst>
+                                    <p:cond delay="0"/>
+                                  </p:stCondLst>
+                                  <p:childTnLst>
+                                    <p:set>
+                                      <p:cBhvr>
+                                        <p:cTn id="14" dur="1" fill="hold">
+                                          <p:stCondLst>
+                                            <p:cond delay="0"/>
+                                          </p:stCondLst>
+                                        </p:cTn>
+                                        <p:tgtEl>
+                                          <p:spTgt spid="24"/>
+                                        </p:tgtEl>
+                                        <p:attrNameLst>
+                                          <p:attrName>style.visibility</p:attrName>
+                                        </p:attrNameLst>
+                                      </p:cBhvr>
+                                      <p:to>
+                                        <p:strVal val="visible"/>
+                                      </p:to>
+                                    </p:set>
+                                  </p:childTnLst>
+                                </p:cTn>
+                              </p:par>
+                            </p:childTnLst>
+                          </p:cTn>
+                        </p:par>
+                      </p:childTnLst>
+                    </p:cTn>
+                  </p:par>
+                  <p:par>
+                    <p:cTn id="15" fill="hold">
+                      <p:stCondLst>
+                        <p:cond delay="indefinite"/>
+                      </p:stCondLst>
+                      <p:childTnLst>
+                        <p:par>
+                          <p:cTn id="16" fill="hold">
+                            <p:stCondLst>
+                              <p:cond delay="0"/>
+                            </p:stCondLst>
+                            <p:childTnLst>
+                              <p:par>
+                                <p:cTn id="17" presetID="1" presetClass="entr" presetSubtype="0" fill="hold" grpId="0" nodeType="clickEffect">
+                                  <p:stCondLst>
+                                    <p:cond delay="0"/>
+                                  </p:stCondLst>
+                                  <p:childTnLst>
+                                    <p:set>
+                                      <p:cBhvr>
+                                        <p:cTn id="18" dur="1" fill="hold">
+                                          <p:stCondLst>
+                                            <p:cond delay="0"/>
+                                          </p:stCondLst>
+                                        </p:cTn>
+                                        <p:tgtEl>
+                                          <p:spTgt spid="19"/>
+                                        </p:tgtEl>
+                                        <p:attrNameLst>
+                                          <p:attrName>style.visibility</p:attrName>
+                                        </p:attrNameLst>
+                                      </p:cBhvr>
+                                      <p:to>
+                                        <p:strVal val="visible"/>
+                                      </p:to>
+                                    </p:set>
+                                  </p:childTnLst>
+                                </p:cTn>
+                              </p:par>
+                              <p:par>
+                                <p:cTn id="19" presetID="1" presetClass="entr" presetSubtype="0" fill="hold" nodeType="withEffect">
+                                  <p:stCondLst>
+                                    <p:cond delay="0"/>
+                                  </p:stCondLst>
+                                  <p:childTnLst>
+                                    <p:set>
+                                      <p:cBhvr>
+                                        <p:cTn id="20" dur="1" fill="hold">
+                                          <p:stCondLst>
+                                            <p:cond delay="0"/>
+                                          </p:stCondLst>
+                                        </p:cTn>
+                                        <p:tgtEl>
+                                          <p:spTgt spid="22"/>
+                                        </p:tgtEl>
+                                        <p:attrNameLst>
+                                          <p:attrName>style.visibility</p:attrName>
+                                        </p:attrNameLst>
+                                      </p:cBhvr>
+                                      <p:to>
+                                        <p:strVal val="visible"/>
+                                      </p:to>
+                                    </p:set>
+                                  </p:childTnLst>
+                                </p:cTn>
+                              </p:par>
+                              <p:par>
+                                <p:cTn id="21" presetID="1" presetClass="entr" presetSubtype="0" fill="hold" grpId="0" nodeType="withEffect">
+                                  <p:stCondLst>
+                                    <p:cond delay="0"/>
+                                  </p:stCondLst>
+                                  <p:childTnLst>
+                                    <p:set>
+                                      <p:cBhvr>
+                                        <p:cTn id="22" dur="1" fill="hold">
+                                          <p:stCondLst>
+                                            <p:cond delay="0"/>
+                                          </p:stCondLst>
+                                        </p:cTn>
+                                        <p:tgtEl>
+                                          <p:spTgt spid="26"/>
+                                        </p:tgtEl>
+                                        <p:attrNameLst>
+                                          <p:attrName>style.visibility</p:attrName>
+                                        </p:attrNameLst>
+                                      </p:cBhvr>
+                                      <p:to>
+                                        <p:strVal val="visible"/>
+                                      </p:to>
+                                    </p:set>
+                                  </p:childTnLst>
+                                </p:cTn>
+                              </p:par>
+                            </p:childTnLst>
+                          </p:cTn>
+                        </p:par>
+                      </p:childTnLst>
+                    </p:cTn>
+                  </p:par>
+                </p:childTnLst>
+              </p:cTn>
+              <p:prevCondLst>
+                <p:cond evt="onPrev" delay="0">
+                  <p:tgtEl>
+                    <p:sldTgt/>
+                  </p:tgtEl>
+                </p:cond>
+              </p:prevCondLst>
+              <p:nextCondLst>
+                <p:cond evt="onNext" delay="0">
+                  <p:tgtEl>
+                    <p:sldTgt/>
+                  </p:tgtEl>
+                </p:cond>
+              </p:nextCondLst>
+            </p:seq>
+          </p:childTnLst>
+        </p:cTn>
+      </p:par>
+    </p:tnLst>
+    <p:bldLst>
+      <p:bldP spid="18" grpId="0" animBg="1"/>
+      <p:bldP spid="19" grpId="0" animBg="1"/>
+      <p:bldP spid="14" grpId="0" animBg="1"/>
+      <p:bldP spid="24" grpId="0" animBg="1"/>
+      <p:bldP spid="26" grpId="0" animBg="1"/>
+    </p:bldLst>
+  </p:timing>
 </p:sld>
 </file>
 
@@ -25286,6 +29376,182 @@
   <p:clrMapOvr>
     <a:masterClrMapping/>
   </p:clrMapOvr>
+  <p:timing>
+    <p:tnLst>
+      <p:par>
+        <p:cTn id="1" dur="indefinite" restart="never" nodeType="tmRoot">
+          <p:childTnLst>
+            <p:seq concurrent="1" nextAc="seek">
+              <p:cTn id="2" dur="indefinite" nodeType="mainSeq">
+                <p:childTnLst>
+                  <p:par>
+                    <p:cTn id="3" fill="hold">
+                      <p:stCondLst>
+                        <p:cond delay="indefinite"/>
+                      </p:stCondLst>
+                      <p:childTnLst>
+                        <p:par>
+                          <p:cTn id="4" fill="hold">
+                            <p:stCondLst>
+                              <p:cond delay="0"/>
+                            </p:stCondLst>
+                            <p:childTnLst>
+                              <p:par>
+                                <p:cTn id="5" presetID="1" presetClass="entr" presetSubtype="0" fill="hold" grpId="0" nodeType="clickEffect">
+                                  <p:stCondLst>
+                                    <p:cond delay="0"/>
+                                  </p:stCondLst>
+                                  <p:childTnLst>
+                                    <p:set>
+                                      <p:cBhvr>
+                                        <p:cTn id="6" dur="1" fill="hold">
+                                          <p:stCondLst>
+                                            <p:cond delay="0"/>
+                                          </p:stCondLst>
+                                        </p:cTn>
+                                        <p:tgtEl>
+                                          <p:spTgt spid="3"/>
+                                        </p:tgtEl>
+                                        <p:attrNameLst>
+                                          <p:attrName>style.visibility</p:attrName>
+                                        </p:attrNameLst>
+                                      </p:cBhvr>
+                                      <p:to>
+                                        <p:strVal val="visible"/>
+                                      </p:to>
+                                    </p:set>
+                                  </p:childTnLst>
+                                </p:cTn>
+                              </p:par>
+                            </p:childTnLst>
+                          </p:cTn>
+                        </p:par>
+                      </p:childTnLst>
+                    </p:cTn>
+                  </p:par>
+                  <p:par>
+                    <p:cTn id="7" fill="hold">
+                      <p:stCondLst>
+                        <p:cond delay="indefinite"/>
+                      </p:stCondLst>
+                      <p:childTnLst>
+                        <p:par>
+                          <p:cTn id="8" fill="hold">
+                            <p:stCondLst>
+                              <p:cond delay="0"/>
+                            </p:stCondLst>
+                            <p:childTnLst>
+                              <p:par>
+                                <p:cTn id="9" presetID="1" presetClass="entr" presetSubtype="0" fill="hold" nodeType="clickEffect">
+                                  <p:stCondLst>
+                                    <p:cond delay="0"/>
+                                  </p:stCondLst>
+                                  <p:childTnLst>
+                                    <p:set>
+                                      <p:cBhvr>
+                                        <p:cTn id="10" dur="1" fill="hold">
+                                          <p:stCondLst>
+                                            <p:cond delay="0"/>
+                                          </p:stCondLst>
+                                        </p:cTn>
+                                        <p:tgtEl>
+                                          <p:spTgt spid="8">
+                                            <p:txEl>
+                                              <p:pRg st="4" end="4"/>
+                                            </p:txEl>
+                                          </p:spTgt>
+                                        </p:tgtEl>
+                                        <p:attrNameLst>
+                                          <p:attrName>style.visibility</p:attrName>
+                                        </p:attrNameLst>
+                                      </p:cBhvr>
+                                      <p:to>
+                                        <p:strVal val="visible"/>
+                                      </p:to>
+                                    </p:set>
+                                  </p:childTnLst>
+                                </p:cTn>
+                              </p:par>
+                            </p:childTnLst>
+                          </p:cTn>
+                        </p:par>
+                      </p:childTnLst>
+                    </p:cTn>
+                  </p:par>
+                  <p:par>
+                    <p:cTn id="11" fill="hold">
+                      <p:stCondLst>
+                        <p:cond delay="indefinite"/>
+                      </p:stCondLst>
+                      <p:childTnLst>
+                        <p:par>
+                          <p:cTn id="12" fill="hold">
+                            <p:stCondLst>
+                              <p:cond delay="0"/>
+                            </p:stCondLst>
+                            <p:childTnLst>
+                              <p:par>
+                                <p:cTn id="13" presetID="1" presetClass="entr" presetSubtype="0" fill="hold" nodeType="clickEffect">
+                                  <p:stCondLst>
+                                    <p:cond delay="0"/>
+                                  </p:stCondLst>
+                                  <p:childTnLst>
+                                    <p:set>
+                                      <p:cBhvr>
+                                        <p:cTn id="14" dur="1" fill="hold">
+                                          <p:stCondLst>
+                                            <p:cond delay="0"/>
+                                          </p:stCondLst>
+                                        </p:cTn>
+                                        <p:tgtEl>
+                                          <p:spTgt spid="8">
+                                            <p:txEl>
+                                              <p:pRg st="5" end="5"/>
+                                            </p:txEl>
+                                          </p:spTgt>
+                                        </p:tgtEl>
+                                        <p:attrNameLst>
+                                          <p:attrName>style.visibility</p:attrName>
+                                        </p:attrNameLst>
+                                      </p:cBhvr>
+                                      <p:to>
+                                        <p:strVal val="visible"/>
+                                      </p:to>
+                                    </p:set>
+                                  </p:childTnLst>
+                                </p:cTn>
+                              </p:par>
+                            </p:childTnLst>
+                          </p:cTn>
+                        </p:par>
+                      </p:childTnLst>
+                    </p:cTn>
+                  </p:par>
+                </p:childTnLst>
+              </p:cTn>
+              <p:prevCondLst>
+                <p:cond evt="onPrev" delay="0">
+                  <p:tgtEl>
+                    <p:sldTgt/>
+                  </p:tgtEl>
+                </p:cond>
+              </p:prevCondLst>
+              <p:nextCondLst>
+                <p:cond evt="onNext" delay="0">
+                  <p:tgtEl>
+                    <p:sldTgt/>
+                  </p:tgtEl>
+                </p:cond>
+              </p:nextCondLst>
+            </p:seq>
+          </p:childTnLst>
+        </p:cTn>
+      </p:par>
+    </p:tnLst>
+    <p:bldLst>
+      <p:bldP spid="3" grpId="0" animBg="1"/>
+    </p:bldLst>
+  </p:timing>
 </p:sld>
 </file>
 
@@ -25492,7 +29758,7 @@
                 </a:solidFill>
                 <a:latin typeface="Trebuchet MS" charset="0"/>
               </a:rPr>
-              <a:t>V5.0 had inheritance:</a:t>
+              <a:t>V5.0 has inheritance:</a:t>
             </a:r>
             <a:endParaRPr lang="en-GB" sz="2400" b="0" noProof="1">
               <a:latin typeface="Courier" charset="0"/>
@@ -26143,6 +30409,184 @@
   <p:clrMapOvr>
     <a:masterClrMapping/>
   </p:clrMapOvr>
+  <p:timing>
+    <p:tnLst>
+      <p:par>
+        <p:cTn id="1" dur="indefinite" restart="never" nodeType="tmRoot">
+          <p:childTnLst>
+            <p:seq concurrent="1" nextAc="seek">
+              <p:cTn id="2" dur="indefinite" nodeType="mainSeq">
+                <p:childTnLst>
+                  <p:par>
+                    <p:cTn id="3" fill="hold">
+                      <p:stCondLst>
+                        <p:cond delay="indefinite"/>
+                      </p:stCondLst>
+                      <p:childTnLst>
+                        <p:par>
+                          <p:cTn id="4" fill="hold">
+                            <p:stCondLst>
+                              <p:cond delay="0"/>
+                            </p:stCondLst>
+                            <p:childTnLst>
+                              <p:par>
+                                <p:cTn id="5" presetID="1" presetClass="entr" presetSubtype="0" fill="hold" grpId="0" nodeType="clickEffect">
+                                  <p:stCondLst>
+                                    <p:cond delay="0"/>
+                                  </p:stCondLst>
+                                  <p:childTnLst>
+                                    <p:set>
+                                      <p:cBhvr>
+                                        <p:cTn id="6" dur="1" fill="hold">
+                                          <p:stCondLst>
+                                            <p:cond delay="0"/>
+                                          </p:stCondLst>
+                                        </p:cTn>
+                                        <p:tgtEl>
+                                          <p:spTgt spid="4"/>
+                                        </p:tgtEl>
+                                        <p:attrNameLst>
+                                          <p:attrName>style.visibility</p:attrName>
+                                        </p:attrNameLst>
+                                      </p:cBhvr>
+                                      <p:to>
+                                        <p:strVal val="visible"/>
+                                      </p:to>
+                                    </p:set>
+                                  </p:childTnLst>
+                                </p:cTn>
+                              </p:par>
+                              <p:par>
+                                <p:cTn id="7" presetID="1" presetClass="entr" presetSubtype="0" fill="hold" nodeType="withEffect">
+                                  <p:stCondLst>
+                                    <p:cond delay="0"/>
+                                  </p:stCondLst>
+                                  <p:childTnLst>
+                                    <p:set>
+                                      <p:cBhvr>
+                                        <p:cTn id="8" dur="1" fill="hold">
+                                          <p:stCondLst>
+                                            <p:cond delay="0"/>
+                                          </p:stCondLst>
+                                        </p:cTn>
+                                        <p:tgtEl>
+                                          <p:spTgt spid="5"/>
+                                        </p:tgtEl>
+                                        <p:attrNameLst>
+                                          <p:attrName>style.visibility</p:attrName>
+                                        </p:attrNameLst>
+                                      </p:cBhvr>
+                                      <p:to>
+                                        <p:strVal val="visible"/>
+                                      </p:to>
+                                    </p:set>
+                                  </p:childTnLst>
+                                </p:cTn>
+                              </p:par>
+                            </p:childTnLst>
+                          </p:cTn>
+                        </p:par>
+                      </p:childTnLst>
+                    </p:cTn>
+                  </p:par>
+                  <p:par>
+                    <p:cTn id="9" fill="hold">
+                      <p:stCondLst>
+                        <p:cond delay="indefinite"/>
+                      </p:stCondLst>
+                      <p:childTnLst>
+                        <p:par>
+                          <p:cTn id="10" fill="hold">
+                            <p:stCondLst>
+                              <p:cond delay="0"/>
+                            </p:stCondLst>
+                            <p:childTnLst>
+                              <p:par>
+                                <p:cTn id="11" presetID="1" presetClass="entr" presetSubtype="0" fill="hold" grpId="0" nodeType="clickEffect">
+                                  <p:stCondLst>
+                                    <p:cond delay="0"/>
+                                  </p:stCondLst>
+                                  <p:childTnLst>
+                                    <p:set>
+                                      <p:cBhvr>
+                                        <p:cTn id="12" dur="1" fill="hold">
+                                          <p:stCondLst>
+                                            <p:cond delay="0"/>
+                                          </p:stCondLst>
+                                        </p:cTn>
+                                        <p:tgtEl>
+                                          <p:spTgt spid="28676"/>
+                                        </p:tgtEl>
+                                        <p:attrNameLst>
+                                          <p:attrName>style.visibility</p:attrName>
+                                        </p:attrNameLst>
+                                      </p:cBhvr>
+                                      <p:to>
+                                        <p:strVal val="visible"/>
+                                      </p:to>
+                                    </p:set>
+                                  </p:childTnLst>
+                                </p:cTn>
+                              </p:par>
+                              <p:par>
+                                <p:cTn id="13" presetID="1" presetClass="entr" presetSubtype="0" fill="hold" nodeType="withEffect">
+                                  <p:stCondLst>
+                                    <p:cond delay="0"/>
+                                  </p:stCondLst>
+                                  <p:childTnLst>
+                                    <p:set>
+                                      <p:cBhvr>
+                                        <p:cTn id="14" dur="1" fill="hold">
+                                          <p:stCondLst>
+                                            <p:cond delay="0"/>
+                                          </p:stCondLst>
+                                        </p:cTn>
+                                        <p:tgtEl>
+                                          <p:spTgt spid="6"/>
+                                        </p:tgtEl>
+                                        <p:attrNameLst>
+                                          <p:attrName>style.visibility</p:attrName>
+                                        </p:attrNameLst>
+                                      </p:cBhvr>
+                                      <p:to>
+                                        <p:strVal val="visible"/>
+                                      </p:to>
+                                    </p:set>
+                                  </p:childTnLst>
+                                </p:cTn>
+                              </p:par>
+                            </p:childTnLst>
+                          </p:cTn>
+                        </p:par>
+                      </p:childTnLst>
+                    </p:cTn>
+                  </p:par>
+                </p:childTnLst>
+              </p:cTn>
+              <p:prevCondLst>
+                <p:cond evt="onPrev" delay="0">
+                  <p:tgtEl>
+                    <p:sldTgt/>
+                  </p:tgtEl>
+                </p:cond>
+              </p:prevCondLst>
+              <p:nextCondLst>
+                <p:cond evt="onNext" delay="0">
+                  <p:tgtEl>
+                    <p:sldTgt/>
+                  </p:tgtEl>
+                </p:cond>
+              </p:nextCondLst>
+            </p:seq>
+          </p:childTnLst>
+        </p:cTn>
+      </p:par>
+    </p:tnLst>
+    <p:bldLst>
+      <p:bldP spid="28676" grpId="0" animBg="1"/>
+      <p:bldP spid="4" grpId="0" animBg="1"/>
+    </p:bldLst>
+  </p:timing>
 </p:sld>
 </file>
 
@@ -26378,6 +30822,232 @@
   <p:clrMapOvr>
     <a:masterClrMapping/>
   </p:clrMapOvr>
+  <p:timing>
+    <p:tnLst>
+      <p:par>
+        <p:cTn id="1" dur="indefinite" restart="never" nodeType="tmRoot">
+          <p:childTnLst>
+            <p:seq concurrent="1" nextAc="seek">
+              <p:cTn id="2" dur="indefinite" nodeType="mainSeq">
+                <p:childTnLst>
+                  <p:par>
+                    <p:cTn id="3" fill="hold">
+                      <p:stCondLst>
+                        <p:cond delay="indefinite"/>
+                      </p:stCondLst>
+                      <p:childTnLst>
+                        <p:par>
+                          <p:cTn id="4" fill="hold">
+                            <p:stCondLst>
+                              <p:cond delay="0"/>
+                            </p:stCondLst>
+                            <p:childTnLst>
+                              <p:par>
+                                <p:cTn id="5" presetID="1" presetClass="entr" presetSubtype="0" fill="hold" nodeType="clickEffect">
+                                  <p:stCondLst>
+                                    <p:cond delay="0"/>
+                                  </p:stCondLst>
+                                  <p:childTnLst>
+                                    <p:set>
+                                      <p:cBhvr>
+                                        <p:cTn id="6" dur="1" fill="hold">
+                                          <p:stCondLst>
+                                            <p:cond delay="0"/>
+                                          </p:stCondLst>
+                                        </p:cTn>
+                                        <p:tgtEl>
+                                          <p:spTgt spid="191492">
+                                            <p:txEl>
+                                              <p:pRg st="0" end="0"/>
+                                            </p:txEl>
+                                          </p:spTgt>
+                                        </p:tgtEl>
+                                        <p:attrNameLst>
+                                          <p:attrName>style.visibility</p:attrName>
+                                        </p:attrNameLst>
+                                      </p:cBhvr>
+                                      <p:to>
+                                        <p:strVal val="visible"/>
+                                      </p:to>
+                                    </p:set>
+                                  </p:childTnLst>
+                                </p:cTn>
+                              </p:par>
+                            </p:childTnLst>
+                          </p:cTn>
+                        </p:par>
+                      </p:childTnLst>
+                    </p:cTn>
+                  </p:par>
+                  <p:par>
+                    <p:cTn id="7" fill="hold">
+                      <p:stCondLst>
+                        <p:cond delay="indefinite"/>
+                      </p:stCondLst>
+                      <p:childTnLst>
+                        <p:par>
+                          <p:cTn id="8" fill="hold">
+                            <p:stCondLst>
+                              <p:cond delay="0"/>
+                            </p:stCondLst>
+                            <p:childTnLst>
+                              <p:par>
+                                <p:cTn id="9" presetID="1" presetClass="entr" presetSubtype="0" fill="hold" nodeType="clickEffect">
+                                  <p:stCondLst>
+                                    <p:cond delay="0"/>
+                                  </p:stCondLst>
+                                  <p:childTnLst>
+                                    <p:set>
+                                      <p:cBhvr>
+                                        <p:cTn id="10" dur="1" fill="hold">
+                                          <p:stCondLst>
+                                            <p:cond delay="0"/>
+                                          </p:stCondLst>
+                                        </p:cTn>
+                                        <p:tgtEl>
+                                          <p:spTgt spid="191492">
+                                            <p:txEl>
+                                              <p:pRg st="2" end="2"/>
+                                            </p:txEl>
+                                          </p:spTgt>
+                                        </p:tgtEl>
+                                        <p:attrNameLst>
+                                          <p:attrName>style.visibility</p:attrName>
+                                        </p:attrNameLst>
+                                      </p:cBhvr>
+                                      <p:to>
+                                        <p:strVal val="visible"/>
+                                      </p:to>
+                                    </p:set>
+                                  </p:childTnLst>
+                                </p:cTn>
+                              </p:par>
+                            </p:childTnLst>
+                          </p:cTn>
+                        </p:par>
+                      </p:childTnLst>
+                    </p:cTn>
+                  </p:par>
+                  <p:par>
+                    <p:cTn id="11" fill="hold">
+                      <p:stCondLst>
+                        <p:cond delay="indefinite"/>
+                      </p:stCondLst>
+                      <p:childTnLst>
+                        <p:par>
+                          <p:cTn id="12" fill="hold">
+                            <p:stCondLst>
+                              <p:cond delay="0"/>
+                            </p:stCondLst>
+                            <p:childTnLst>
+                              <p:par>
+                                <p:cTn id="13" presetID="1" presetClass="entr" presetSubtype="0" fill="hold" nodeType="clickEffect">
+                                  <p:stCondLst>
+                                    <p:cond delay="0"/>
+                                  </p:stCondLst>
+                                  <p:childTnLst>
+                                    <p:set>
+                                      <p:cBhvr>
+                                        <p:cTn id="14" dur="1" fill="hold">
+                                          <p:stCondLst>
+                                            <p:cond delay="0"/>
+                                          </p:stCondLst>
+                                        </p:cTn>
+                                        <p:tgtEl>
+                                          <p:spTgt spid="191492">
+                                            <p:txEl>
+                                              <p:pRg st="4" end="4"/>
+                                            </p:txEl>
+                                          </p:spTgt>
+                                        </p:tgtEl>
+                                        <p:attrNameLst>
+                                          <p:attrName>style.visibility</p:attrName>
+                                        </p:attrNameLst>
+                                      </p:cBhvr>
+                                      <p:to>
+                                        <p:strVal val="visible"/>
+                                      </p:to>
+                                    </p:set>
+                                  </p:childTnLst>
+                                </p:cTn>
+                              </p:par>
+                            </p:childTnLst>
+                          </p:cTn>
+                        </p:par>
+                      </p:childTnLst>
+                    </p:cTn>
+                  </p:par>
+                  <p:par>
+                    <p:cTn id="15" fill="hold">
+                      <p:stCondLst>
+                        <p:cond delay="indefinite"/>
+                      </p:stCondLst>
+                      <p:childTnLst>
+                        <p:par>
+                          <p:cTn id="16" fill="hold">
+                            <p:stCondLst>
+                              <p:cond delay="0"/>
+                            </p:stCondLst>
+                            <p:childTnLst>
+                              <p:par>
+                                <p:cTn id="17" presetID="1" presetClass="entr" presetSubtype="0" fill="hold" nodeType="clickEffect">
+                                  <p:stCondLst>
+                                    <p:cond delay="0"/>
+                                  </p:stCondLst>
+                                  <p:childTnLst>
+                                    <p:set>
+                                      <p:cBhvr>
+                                        <p:cTn id="18" dur="1" fill="hold">
+                                          <p:stCondLst>
+                                            <p:cond delay="0"/>
+                                          </p:stCondLst>
+                                        </p:cTn>
+                                        <p:tgtEl>
+                                          <p:spTgt spid="191492">
+                                            <p:txEl>
+                                              <p:pRg st="5" end="5"/>
+                                            </p:txEl>
+                                          </p:spTgt>
+                                        </p:tgtEl>
+                                        <p:attrNameLst>
+                                          <p:attrName>style.visibility</p:attrName>
+                                        </p:attrNameLst>
+                                      </p:cBhvr>
+                                      <p:to>
+                                        <p:strVal val="visible"/>
+                                      </p:to>
+                                    </p:set>
+                                  </p:childTnLst>
+                                </p:cTn>
+                              </p:par>
+                            </p:childTnLst>
+                          </p:cTn>
+                        </p:par>
+                      </p:childTnLst>
+                    </p:cTn>
+                  </p:par>
+                </p:childTnLst>
+              </p:cTn>
+              <p:prevCondLst>
+                <p:cond evt="onPrev" delay="0">
+                  <p:tgtEl>
+                    <p:sldTgt/>
+                  </p:tgtEl>
+                </p:cond>
+              </p:prevCondLst>
+              <p:nextCondLst>
+                <p:cond evt="onNext" delay="0">
+                  <p:tgtEl>
+                    <p:sldTgt/>
+                  </p:tgtEl>
+                </p:cond>
+              </p:nextCondLst>
+            </p:seq>
+          </p:childTnLst>
+        </p:cTn>
+      </p:par>
+    </p:tnLst>
+  </p:timing>
 </p:sld>
 </file>
 
